--- a/Data/PPT_Learn/PPT_File/14.pptx
+++ b/Data/PPT_Learn/PPT_File/14.pptx
@@ -887,7 +887,7 @@
         <a:lstStyle/>
         <a:p>
           <a:r>
-            <a:rPr lang="en-US" dirty="0" smtClean="0"/>
+            <a:rPr lang="en-US" dirty="0"/>
             <a:t>Road to Fitness</a:t>
           </a:r>
           <a:endParaRPr lang="vi-VN" dirty="0"/>
@@ -924,7 +924,7 @@
         <a:lstStyle/>
         <a:p>
           <a:r>
-            <a:rPr lang="en-US" dirty="0" smtClean="0"/>
+            <a:rPr lang="en-US" dirty="0"/>
             <a:t>Plan</a:t>
           </a:r>
           <a:endParaRPr lang="vi-VN" dirty="0"/>
@@ -961,7 +961,7 @@
         <a:lstStyle/>
         <a:p>
           <a:r>
-            <a:rPr lang="en-US" dirty="0" smtClean="0"/>
+            <a:rPr lang="en-US" dirty="0"/>
             <a:t>train</a:t>
           </a:r>
           <a:endParaRPr lang="vi-VN" dirty="0"/>
@@ -998,7 +998,7 @@
         <a:lstStyle/>
         <a:p>
           <a:r>
-            <a:rPr lang="en-US" dirty="0" smtClean="0"/>
+            <a:rPr lang="en-US" dirty="0"/>
             <a:t>Evaluates</a:t>
           </a:r>
           <a:endParaRPr lang="vi-VN" dirty="0"/>
@@ -1035,7 +1035,7 @@
         <a:lstStyle/>
         <a:p>
           <a:r>
-            <a:rPr lang="en-US" dirty="0" smtClean="0"/>
+            <a:rPr lang="en-US" dirty="0"/>
             <a:t>Modify</a:t>
           </a:r>
           <a:endParaRPr lang="vi-VN" dirty="0"/>
@@ -1074,24 +1074,10 @@
         </dgm:presLayoutVars>
       </dgm:prSet>
       <dgm:spPr/>
-      <dgm:t>
-        <a:bodyPr/>
-        <a:lstStyle/>
-        <a:p>
-          <a:endParaRPr lang="vi-VN"/>
-        </a:p>
-      </dgm:t>
     </dgm:pt>
     <dgm:pt modelId="{04F55A27-C225-490D-BA73-BB55A0DEBF17}" type="pres">
       <dgm:prSet presAssocID="{0FEB40BC-F8D5-44FF-BF0D-4759C8413384}" presName="centerShape" presStyleLbl="node0" presStyleIdx="0" presStyleCnt="1"/>
       <dgm:spPr/>
-      <dgm:t>
-        <a:bodyPr/>
-        <a:lstStyle/>
-        <a:p>
-          <a:endParaRPr lang="vi-VN"/>
-        </a:p>
-      </dgm:t>
     </dgm:pt>
     <dgm:pt modelId="{CCAD57D2-C8FA-423B-B148-CF6230ECDB5C}" type="pres">
       <dgm:prSet presAssocID="{1DC683F8-CACD-40B9-9D8D-0BD348156635}" presName="node" presStyleLbl="node1" presStyleIdx="0" presStyleCnt="4">
@@ -1100,13 +1086,6 @@
         </dgm:presLayoutVars>
       </dgm:prSet>
       <dgm:spPr/>
-      <dgm:t>
-        <a:bodyPr/>
-        <a:lstStyle/>
-        <a:p>
-          <a:endParaRPr lang="vi-VN"/>
-        </a:p>
-      </dgm:t>
     </dgm:pt>
     <dgm:pt modelId="{656899DE-BA5A-4255-BE5A-078E1681FA70}" type="pres">
       <dgm:prSet presAssocID="{1DC683F8-CACD-40B9-9D8D-0BD348156635}" presName="dummy" presStyleCnt="0"/>
@@ -1115,13 +1094,6 @@
     <dgm:pt modelId="{E38145B7-D7FC-4198-A630-4F70755044BB}" type="pres">
       <dgm:prSet presAssocID="{E3A90307-D77D-4719-AD15-16428474F1C9}" presName="sibTrans" presStyleLbl="sibTrans2D1" presStyleIdx="0" presStyleCnt="4"/>
       <dgm:spPr/>
-      <dgm:t>
-        <a:bodyPr/>
-        <a:lstStyle/>
-        <a:p>
-          <a:endParaRPr lang="vi-VN"/>
-        </a:p>
-      </dgm:t>
     </dgm:pt>
     <dgm:pt modelId="{8EA08D80-C2EF-4078-9FCD-E323C75274CA}" type="pres">
       <dgm:prSet presAssocID="{0F81245D-41D8-409F-AEA1-7BB732F6A1CB}" presName="node" presStyleLbl="node1" presStyleIdx="1" presStyleCnt="4">
@@ -1130,13 +1102,6 @@
         </dgm:presLayoutVars>
       </dgm:prSet>
       <dgm:spPr/>
-      <dgm:t>
-        <a:bodyPr/>
-        <a:lstStyle/>
-        <a:p>
-          <a:endParaRPr lang="vi-VN"/>
-        </a:p>
-      </dgm:t>
     </dgm:pt>
     <dgm:pt modelId="{54FDAFB6-D039-4BC5-9E6B-F5654F6514DB}" type="pres">
       <dgm:prSet presAssocID="{0F81245D-41D8-409F-AEA1-7BB732F6A1CB}" presName="dummy" presStyleCnt="0"/>
@@ -1145,13 +1110,6 @@
     <dgm:pt modelId="{C67B9933-9736-4D26-BC36-E87A519E05EC}" type="pres">
       <dgm:prSet presAssocID="{57B31501-ED38-4F0E-9A3E-674F9963CFAD}" presName="sibTrans" presStyleLbl="sibTrans2D1" presStyleIdx="1" presStyleCnt="4"/>
       <dgm:spPr/>
-      <dgm:t>
-        <a:bodyPr/>
-        <a:lstStyle/>
-        <a:p>
-          <a:endParaRPr lang="vi-VN"/>
-        </a:p>
-      </dgm:t>
     </dgm:pt>
     <dgm:pt modelId="{274D0425-0131-4840-BF86-A180752EB792}" type="pres">
       <dgm:prSet presAssocID="{299DFC5E-2C07-437F-804C-0163FDC4FE05}" presName="node" presStyleLbl="node1" presStyleIdx="2" presStyleCnt="4">
@@ -1160,13 +1118,6 @@
         </dgm:presLayoutVars>
       </dgm:prSet>
       <dgm:spPr/>
-      <dgm:t>
-        <a:bodyPr/>
-        <a:lstStyle/>
-        <a:p>
-          <a:endParaRPr lang="vi-VN"/>
-        </a:p>
-      </dgm:t>
     </dgm:pt>
     <dgm:pt modelId="{B5D2ED28-FA51-453D-B898-44C2BA74BBCA}" type="pres">
       <dgm:prSet presAssocID="{299DFC5E-2C07-437F-804C-0163FDC4FE05}" presName="dummy" presStyleCnt="0"/>
@@ -1175,13 +1126,6 @@
     <dgm:pt modelId="{4F46DEA8-FEC7-4DB0-9D75-4CAD976762DA}" type="pres">
       <dgm:prSet presAssocID="{845007E3-A331-4790-9450-160792FB96AD}" presName="sibTrans" presStyleLbl="sibTrans2D1" presStyleIdx="2" presStyleCnt="4"/>
       <dgm:spPr/>
-      <dgm:t>
-        <a:bodyPr/>
-        <a:lstStyle/>
-        <a:p>
-          <a:endParaRPr lang="vi-VN"/>
-        </a:p>
-      </dgm:t>
     </dgm:pt>
     <dgm:pt modelId="{78663B3F-8819-4D4C-81F4-E8723416911D}" type="pres">
       <dgm:prSet presAssocID="{107210D3-482E-43AB-8B9A-A8EA93762444}" presName="node" presStyleLbl="node1" presStyleIdx="3" presStyleCnt="4">
@@ -1190,13 +1134,6 @@
         </dgm:presLayoutVars>
       </dgm:prSet>
       <dgm:spPr/>
-      <dgm:t>
-        <a:bodyPr/>
-        <a:lstStyle/>
-        <a:p>
-          <a:endParaRPr lang="vi-VN"/>
-        </a:p>
-      </dgm:t>
     </dgm:pt>
     <dgm:pt modelId="{2FCFA2D4-C0C5-4459-91DD-2F1E53729908}" type="pres">
       <dgm:prSet presAssocID="{107210D3-482E-43AB-8B9A-A8EA93762444}" presName="dummy" presStyleCnt="0"/>
@@ -1205,31 +1142,24 @@
     <dgm:pt modelId="{ABFA5C31-B098-4CCB-B051-2B9E2D83E6BC}" type="pres">
       <dgm:prSet presAssocID="{11E67D06-F9B6-42A3-920E-98ED1D83654E}" presName="sibTrans" presStyleLbl="sibTrans2D1" presStyleIdx="3" presStyleCnt="4"/>
       <dgm:spPr/>
-      <dgm:t>
-        <a:bodyPr/>
-        <a:lstStyle/>
-        <a:p>
-          <a:endParaRPr lang="vi-VN"/>
-        </a:p>
-      </dgm:t>
     </dgm:pt>
   </dgm:ptLst>
   <dgm:cxnLst>
+    <dgm:cxn modelId="{49812201-A79A-4F3F-B910-75C24A6FCFEE}" type="presOf" srcId="{E3A90307-D77D-4719-AD15-16428474F1C9}" destId="{E38145B7-D7FC-4198-A630-4F70755044BB}" srcOrd="0" destOrd="0" presId="urn:microsoft.com/office/officeart/2005/8/layout/radial6"/>
+    <dgm:cxn modelId="{D0553024-7E15-487F-8AE3-07F991FE06CC}" type="presOf" srcId="{57B31501-ED38-4F0E-9A3E-674F9963CFAD}" destId="{C67B9933-9736-4D26-BC36-E87A519E05EC}" srcOrd="0" destOrd="0" presId="urn:microsoft.com/office/officeart/2005/8/layout/radial6"/>
+    <dgm:cxn modelId="{CC985233-34BD-4090-BDEA-E637A0DD3E4D}" srcId="{0FEB40BC-F8D5-44FF-BF0D-4759C8413384}" destId="{107210D3-482E-43AB-8B9A-A8EA93762444}" srcOrd="3" destOrd="0" parTransId="{19E50DEB-C4AB-4733-AC3C-F1415017A852}" sibTransId="{11E67D06-F9B6-42A3-920E-98ED1D83654E}"/>
+    <dgm:cxn modelId="{5FA5DA5B-2EBE-44F3-8A2B-1DD1277802ED}" srcId="{0FEB40BC-F8D5-44FF-BF0D-4759C8413384}" destId="{299DFC5E-2C07-437F-804C-0163FDC4FE05}" srcOrd="2" destOrd="0" parTransId="{A0CDF232-2AAE-48E9-A925-D182E8C9C3C6}" sibTransId="{845007E3-A331-4790-9450-160792FB96AD}"/>
+    <dgm:cxn modelId="{1703FE5C-ECDE-4750-AA1B-ABA5B51FB3CD}" type="presOf" srcId="{0F81245D-41D8-409F-AEA1-7BB732F6A1CB}" destId="{8EA08D80-C2EF-4078-9FCD-E323C75274CA}" srcOrd="0" destOrd="0" presId="urn:microsoft.com/office/officeart/2005/8/layout/radial6"/>
+    <dgm:cxn modelId="{7321DB6A-89A1-4427-88AC-40264810F03C}" type="presOf" srcId="{299DFC5E-2C07-437F-804C-0163FDC4FE05}" destId="{274D0425-0131-4840-BF86-A180752EB792}" srcOrd="0" destOrd="0" presId="urn:microsoft.com/office/officeart/2005/8/layout/radial6"/>
+    <dgm:cxn modelId="{47A90189-62C6-46E6-A32A-7D51238FC4D7}" type="presOf" srcId="{845007E3-A331-4790-9450-160792FB96AD}" destId="{4F46DEA8-FEC7-4DB0-9D75-4CAD976762DA}" srcOrd="0" destOrd="0" presId="urn:microsoft.com/office/officeart/2005/8/layout/radial6"/>
+    <dgm:cxn modelId="{7EC4A28B-D8C4-4CB4-9551-03F1ED8C181A}" type="presOf" srcId="{0FEB40BC-F8D5-44FF-BF0D-4759C8413384}" destId="{04F55A27-C225-490D-BA73-BB55A0DEBF17}" srcOrd="0" destOrd="0" presId="urn:microsoft.com/office/officeart/2005/8/layout/radial6"/>
     <dgm:cxn modelId="{F142C3A4-822C-44F7-A4B7-1DB8E117263A}" srcId="{0FEB40BC-F8D5-44FF-BF0D-4759C8413384}" destId="{1DC683F8-CACD-40B9-9D8D-0BD348156635}" srcOrd="0" destOrd="0" parTransId="{A74E2C80-494A-4C1A-A5E4-CDB79B46ADA2}" sibTransId="{E3A90307-D77D-4719-AD15-16428474F1C9}"/>
     <dgm:cxn modelId="{85A31EB0-059C-4723-B027-6522D41976AE}" type="presOf" srcId="{15825D2A-110A-4E6D-B561-F74AB5528796}" destId="{A09E9FC2-9C0E-4DDB-8460-4D387A23F701}" srcOrd="0" destOrd="0" presId="urn:microsoft.com/office/officeart/2005/8/layout/radial6"/>
+    <dgm:cxn modelId="{B1DEF0B9-9555-4019-BACF-528F6826B405}" type="presOf" srcId="{11E67D06-F9B6-42A3-920E-98ED1D83654E}" destId="{ABFA5C31-B098-4CCB-B051-2B9E2D83E6BC}" srcOrd="0" destOrd="0" presId="urn:microsoft.com/office/officeart/2005/8/layout/radial6"/>
     <dgm:cxn modelId="{D8B20CBC-457D-4AE1-AE06-6C07D38D69BD}" type="presOf" srcId="{107210D3-482E-43AB-8B9A-A8EA93762444}" destId="{78663B3F-8819-4D4C-81F4-E8723416911D}" srcOrd="0" destOrd="0" presId="urn:microsoft.com/office/officeart/2005/8/layout/radial6"/>
-    <dgm:cxn modelId="{1703FE5C-ECDE-4750-AA1B-ABA5B51FB3CD}" type="presOf" srcId="{0F81245D-41D8-409F-AEA1-7BB732F6A1CB}" destId="{8EA08D80-C2EF-4078-9FCD-E323C75274CA}" srcOrd="0" destOrd="0" presId="urn:microsoft.com/office/officeart/2005/8/layout/radial6"/>
     <dgm:cxn modelId="{5F8475E1-40F3-4FE8-81FC-9A8613A583F8}" type="presOf" srcId="{1DC683F8-CACD-40B9-9D8D-0BD348156635}" destId="{CCAD57D2-C8FA-423B-B148-CF6230ECDB5C}" srcOrd="0" destOrd="0" presId="urn:microsoft.com/office/officeart/2005/8/layout/radial6"/>
+    <dgm:cxn modelId="{F5BAB0EA-289D-4047-818F-7C82165B9D0B}" srcId="{15825D2A-110A-4E6D-B561-F74AB5528796}" destId="{0FEB40BC-F8D5-44FF-BF0D-4759C8413384}" srcOrd="0" destOrd="0" parTransId="{499E6AE6-3FC0-4CCF-B835-DB25027FBC89}" sibTransId="{29DDF9EB-EF0C-4FFA-8FA9-AA6F8F847977}"/>
     <dgm:cxn modelId="{91D497F8-F0A9-4EC0-9B7F-FBE487E4FA81}" srcId="{0FEB40BC-F8D5-44FF-BF0D-4759C8413384}" destId="{0F81245D-41D8-409F-AEA1-7BB732F6A1CB}" srcOrd="1" destOrd="0" parTransId="{BF487577-815D-49D3-8405-A003ACD5A370}" sibTransId="{57B31501-ED38-4F0E-9A3E-674F9963CFAD}"/>
-    <dgm:cxn modelId="{7EC4A28B-D8C4-4CB4-9551-03F1ED8C181A}" type="presOf" srcId="{0FEB40BC-F8D5-44FF-BF0D-4759C8413384}" destId="{04F55A27-C225-490D-BA73-BB55A0DEBF17}" srcOrd="0" destOrd="0" presId="urn:microsoft.com/office/officeart/2005/8/layout/radial6"/>
-    <dgm:cxn modelId="{CC985233-34BD-4090-BDEA-E637A0DD3E4D}" srcId="{0FEB40BC-F8D5-44FF-BF0D-4759C8413384}" destId="{107210D3-482E-43AB-8B9A-A8EA93762444}" srcOrd="3" destOrd="0" parTransId="{19E50DEB-C4AB-4733-AC3C-F1415017A852}" sibTransId="{11E67D06-F9B6-42A3-920E-98ED1D83654E}"/>
-    <dgm:cxn modelId="{47A90189-62C6-46E6-A32A-7D51238FC4D7}" type="presOf" srcId="{845007E3-A331-4790-9450-160792FB96AD}" destId="{4F46DEA8-FEC7-4DB0-9D75-4CAD976762DA}" srcOrd="0" destOrd="0" presId="urn:microsoft.com/office/officeart/2005/8/layout/radial6"/>
-    <dgm:cxn modelId="{5FA5DA5B-2EBE-44F3-8A2B-1DD1277802ED}" srcId="{0FEB40BC-F8D5-44FF-BF0D-4759C8413384}" destId="{299DFC5E-2C07-437F-804C-0163FDC4FE05}" srcOrd="2" destOrd="0" parTransId="{A0CDF232-2AAE-48E9-A925-D182E8C9C3C6}" sibTransId="{845007E3-A331-4790-9450-160792FB96AD}"/>
-    <dgm:cxn modelId="{D0553024-7E15-487F-8AE3-07F991FE06CC}" type="presOf" srcId="{57B31501-ED38-4F0E-9A3E-674F9963CFAD}" destId="{C67B9933-9736-4D26-BC36-E87A519E05EC}" srcOrd="0" destOrd="0" presId="urn:microsoft.com/office/officeart/2005/8/layout/radial6"/>
-    <dgm:cxn modelId="{B1DEF0B9-9555-4019-BACF-528F6826B405}" type="presOf" srcId="{11E67D06-F9B6-42A3-920E-98ED1D83654E}" destId="{ABFA5C31-B098-4CCB-B051-2B9E2D83E6BC}" srcOrd="0" destOrd="0" presId="urn:microsoft.com/office/officeart/2005/8/layout/radial6"/>
-    <dgm:cxn modelId="{49812201-A79A-4F3F-B910-75C24A6FCFEE}" type="presOf" srcId="{E3A90307-D77D-4719-AD15-16428474F1C9}" destId="{E38145B7-D7FC-4198-A630-4F70755044BB}" srcOrd="0" destOrd="0" presId="urn:microsoft.com/office/officeart/2005/8/layout/radial6"/>
-    <dgm:cxn modelId="{7321DB6A-89A1-4427-88AC-40264810F03C}" type="presOf" srcId="{299DFC5E-2C07-437F-804C-0163FDC4FE05}" destId="{274D0425-0131-4840-BF86-A180752EB792}" srcOrd="0" destOrd="0" presId="urn:microsoft.com/office/officeart/2005/8/layout/radial6"/>
-    <dgm:cxn modelId="{F5BAB0EA-289D-4047-818F-7C82165B9D0B}" srcId="{15825D2A-110A-4E6D-B561-F74AB5528796}" destId="{0FEB40BC-F8D5-44FF-BF0D-4759C8413384}" srcOrd="0" destOrd="0" parTransId="{499E6AE6-3FC0-4CCF-B835-DB25027FBC89}" sibTransId="{29DDF9EB-EF0C-4FFA-8FA9-AA6F8F847977}"/>
     <dgm:cxn modelId="{B0B4844A-DB88-48E0-AE25-0C8A03AB3FC8}" type="presParOf" srcId="{A09E9FC2-9C0E-4DDB-8460-4D387A23F701}" destId="{04F55A27-C225-490D-BA73-BB55A0DEBF17}" srcOrd="0" destOrd="0" presId="urn:microsoft.com/office/officeart/2005/8/layout/radial6"/>
     <dgm:cxn modelId="{75762B18-E03D-4132-A14E-F0E0B9BABE11}" type="presParOf" srcId="{A09E9FC2-9C0E-4DDB-8460-4D387A23F701}" destId="{CCAD57D2-C8FA-423B-B148-CF6230ECDB5C}" srcOrd="1" destOrd="0" presId="urn:microsoft.com/office/officeart/2005/8/layout/radial6"/>
     <dgm:cxn modelId="{608B9A77-F0DE-4C7A-A485-17669C8DE058}" type="presParOf" srcId="{A09E9FC2-9C0E-4DDB-8460-4D387A23F701}" destId="{656899DE-BA5A-4255-BE5A-078E1681FA70}" srcOrd="2" destOrd="0" presId="urn:microsoft.com/office/officeart/2005/8/layout/radial6"/>
@@ -1501,7 +1431,7 @@
         </a:bodyPr>
         <a:lstStyle/>
         <a:p>
-          <a:pPr lvl="0" algn="ctr" defTabSz="1111250">
+          <a:pPr marL="0" lvl="0" indent="0" algn="ctr" defTabSz="1111250">
             <a:lnSpc>
               <a:spcPct val="90000"/>
             </a:lnSpc>
@@ -1511,9 +1441,10 @@
             <a:spcAft>
               <a:spcPct val="35000"/>
             </a:spcAft>
+            <a:buNone/>
           </a:pPr>
           <a:r>
-            <a:rPr lang="en-US" sz="2500" kern="1200" dirty="0" smtClean="0"/>
+            <a:rPr lang="en-US" sz="2500" kern="1200" dirty="0"/>
             <a:t>Road to Fitness</a:t>
           </a:r>
           <a:endParaRPr lang="vi-VN" sz="2500" kern="1200" dirty="0"/>
@@ -1579,7 +1510,7 @@
         </a:bodyPr>
         <a:lstStyle/>
         <a:p>
-          <a:pPr lvl="0" algn="ctr" defTabSz="622300">
+          <a:pPr marL="0" lvl="0" indent="0" algn="ctr" defTabSz="622300">
             <a:lnSpc>
               <a:spcPct val="90000"/>
             </a:lnSpc>
@@ -1589,9 +1520,10 @@
             <a:spcAft>
               <a:spcPct val="35000"/>
             </a:spcAft>
+            <a:buNone/>
           </a:pPr>
           <a:r>
-            <a:rPr lang="en-US" sz="1400" kern="1200" dirty="0" smtClean="0"/>
+            <a:rPr lang="en-US" sz="1400" kern="1200" dirty="0"/>
             <a:t>Plan</a:t>
           </a:r>
           <a:endParaRPr lang="vi-VN" sz="1400" kern="1200" dirty="0"/>
@@ -1657,7 +1589,7 @@
         </a:bodyPr>
         <a:lstStyle/>
         <a:p>
-          <a:pPr lvl="0" algn="ctr" defTabSz="622300">
+          <a:pPr marL="0" lvl="0" indent="0" algn="ctr" defTabSz="622300">
             <a:lnSpc>
               <a:spcPct val="90000"/>
             </a:lnSpc>
@@ -1667,9 +1599,10 @@
             <a:spcAft>
               <a:spcPct val="35000"/>
             </a:spcAft>
+            <a:buNone/>
           </a:pPr>
           <a:r>
-            <a:rPr lang="en-US" sz="1400" kern="1200" dirty="0" smtClean="0"/>
+            <a:rPr lang="en-US" sz="1400" kern="1200" dirty="0"/>
             <a:t>train</a:t>
           </a:r>
           <a:endParaRPr lang="vi-VN" sz="1400" kern="1200" dirty="0"/>
@@ -1735,7 +1668,7 @@
         </a:bodyPr>
         <a:lstStyle/>
         <a:p>
-          <a:pPr lvl="0" algn="ctr" defTabSz="622300">
+          <a:pPr marL="0" lvl="0" indent="0" algn="ctr" defTabSz="622300">
             <a:lnSpc>
               <a:spcPct val="90000"/>
             </a:lnSpc>
@@ -1745,9 +1678,10 @@
             <a:spcAft>
               <a:spcPct val="35000"/>
             </a:spcAft>
+            <a:buNone/>
           </a:pPr>
           <a:r>
-            <a:rPr lang="en-US" sz="1400" kern="1200" dirty="0" smtClean="0"/>
+            <a:rPr lang="en-US" sz="1400" kern="1200" dirty="0"/>
             <a:t>Evaluates</a:t>
           </a:r>
           <a:endParaRPr lang="vi-VN" sz="1400" kern="1200" dirty="0"/>
@@ -1813,7 +1747,7 @@
         </a:bodyPr>
         <a:lstStyle/>
         <a:p>
-          <a:pPr lvl="0" algn="ctr" defTabSz="622300">
+          <a:pPr marL="0" lvl="0" indent="0" algn="ctr" defTabSz="622300">
             <a:lnSpc>
               <a:spcPct val="90000"/>
             </a:lnSpc>
@@ -1823,9 +1757,10 @@
             <a:spcAft>
               <a:spcPct val="35000"/>
             </a:spcAft>
+            <a:buNone/>
           </a:pPr>
           <a:r>
-            <a:rPr lang="en-US" sz="1400" kern="1200" dirty="0" smtClean="0"/>
+            <a:rPr lang="en-US" sz="1400" kern="1200" dirty="0"/>
             <a:t>Modify</a:t>
           </a:r>
           <a:endParaRPr lang="vi-VN" sz="1400" kern="1200" dirty="0"/>
@@ -3303,7 +3238,7 @@
           <p:cNvPr id="2" name="Title 1">
             <a:extLst>
               <a:ext uri="{FF2B5EF4-FFF2-40B4-BE49-F238E27FC236}">
-                <a16:creationId xmlns:a16="http://schemas.microsoft.com/office/drawing/2014/main" xmlns="" id="{DDA47EBD-DF84-488B-703F-E2EEA4BACC8D}"/>
+                <a16:creationId xmlns:a16="http://schemas.microsoft.com/office/drawing/2014/main" id="{DDA47EBD-DF84-488B-703F-E2EEA4BACC8D}"/>
               </a:ext>
             </a:extLst>
           </p:cNvPr>
@@ -3340,7 +3275,7 @@
           <p:cNvPr id="3" name="Subtitle 2">
             <a:extLst>
               <a:ext uri="{FF2B5EF4-FFF2-40B4-BE49-F238E27FC236}">
-                <a16:creationId xmlns:a16="http://schemas.microsoft.com/office/drawing/2014/main" xmlns="" id="{28E4248C-5D87-EFDC-F615-B98E8CCBC4C0}"/>
+                <a16:creationId xmlns:a16="http://schemas.microsoft.com/office/drawing/2014/main" id="{28E4248C-5D87-EFDC-F615-B98E8CCBC4C0}"/>
               </a:ext>
             </a:extLst>
           </p:cNvPr>
@@ -3410,7 +3345,7 @@
           <p:cNvPr id="4" name="Date Placeholder 3">
             <a:extLst>
               <a:ext uri="{FF2B5EF4-FFF2-40B4-BE49-F238E27FC236}">
-                <a16:creationId xmlns:a16="http://schemas.microsoft.com/office/drawing/2014/main" xmlns="" id="{91FC1EB3-4398-B682-98F2-137169B53223}"/>
+                <a16:creationId xmlns:a16="http://schemas.microsoft.com/office/drawing/2014/main" id="{91FC1EB3-4398-B682-98F2-137169B53223}"/>
               </a:ext>
             </a:extLst>
           </p:cNvPr>
@@ -3428,7 +3363,7 @@
           <a:p>
             <a:fld id="{51DA3061-A0A7-4F4A-8031-9CD73C4CB18A}" type="datetimeFigureOut">
               <a:rPr lang="en-US" smtClean="0"/>
-              <a:t>05-08-2024</a:t>
+              <a:t>12/1/2025</a:t>
             </a:fld>
             <a:endParaRPr lang="en-US"/>
           </a:p>
@@ -3439,7 +3374,7 @@
           <p:cNvPr id="5" name="Footer Placeholder 4">
             <a:extLst>
               <a:ext uri="{FF2B5EF4-FFF2-40B4-BE49-F238E27FC236}">
-                <a16:creationId xmlns:a16="http://schemas.microsoft.com/office/drawing/2014/main" xmlns="" id="{7EA73249-8BE2-0E89-2165-4CC2AA10DE3D}"/>
+                <a16:creationId xmlns:a16="http://schemas.microsoft.com/office/drawing/2014/main" id="{7EA73249-8BE2-0E89-2165-4CC2AA10DE3D}"/>
               </a:ext>
             </a:extLst>
           </p:cNvPr>
@@ -3464,7 +3399,7 @@
           <p:cNvPr id="6" name="Slide Number Placeholder 5">
             <a:extLst>
               <a:ext uri="{FF2B5EF4-FFF2-40B4-BE49-F238E27FC236}">
-                <a16:creationId xmlns:a16="http://schemas.microsoft.com/office/drawing/2014/main" xmlns="" id="{AFE7CFD2-A8F3-FE7E-387F-F4F82AE74B9E}"/>
+                <a16:creationId xmlns:a16="http://schemas.microsoft.com/office/drawing/2014/main" id="{AFE7CFD2-A8F3-FE7E-387F-F4F82AE74B9E}"/>
               </a:ext>
             </a:extLst>
           </p:cNvPr>
@@ -3523,7 +3458,7 @@
           <p:cNvPr id="2" name="Title 1">
             <a:extLst>
               <a:ext uri="{FF2B5EF4-FFF2-40B4-BE49-F238E27FC236}">
-                <a16:creationId xmlns:a16="http://schemas.microsoft.com/office/drawing/2014/main" xmlns="" id="{8582CED2-99ED-C866-6BFF-C0C8B4CA9BDD}"/>
+                <a16:creationId xmlns:a16="http://schemas.microsoft.com/office/drawing/2014/main" id="{8582CED2-99ED-C866-6BFF-C0C8B4CA9BDD}"/>
               </a:ext>
             </a:extLst>
           </p:cNvPr>
@@ -3551,7 +3486,7 @@
           <p:cNvPr id="3" name="Vertical Text Placeholder 2">
             <a:extLst>
               <a:ext uri="{FF2B5EF4-FFF2-40B4-BE49-F238E27FC236}">
-                <a16:creationId xmlns:a16="http://schemas.microsoft.com/office/drawing/2014/main" xmlns="" id="{9A629875-E814-1478-CBE7-85D9D3E0F0A0}"/>
+                <a16:creationId xmlns:a16="http://schemas.microsoft.com/office/drawing/2014/main" id="{9A629875-E814-1478-CBE7-85D9D3E0F0A0}"/>
               </a:ext>
             </a:extLst>
           </p:cNvPr>
@@ -3608,7 +3543,7 @@
           <p:cNvPr id="4" name="Date Placeholder 3">
             <a:extLst>
               <a:ext uri="{FF2B5EF4-FFF2-40B4-BE49-F238E27FC236}">
-                <a16:creationId xmlns:a16="http://schemas.microsoft.com/office/drawing/2014/main" xmlns="" id="{BA2D989D-A8A9-30DB-C57A-1CD2F8FBC260}"/>
+                <a16:creationId xmlns:a16="http://schemas.microsoft.com/office/drawing/2014/main" id="{BA2D989D-A8A9-30DB-C57A-1CD2F8FBC260}"/>
               </a:ext>
             </a:extLst>
           </p:cNvPr>
@@ -3626,7 +3561,7 @@
           <a:p>
             <a:fld id="{51DA3061-A0A7-4F4A-8031-9CD73C4CB18A}" type="datetimeFigureOut">
               <a:rPr lang="en-US" smtClean="0"/>
-              <a:t>05-08-2024</a:t>
+              <a:t>12/1/2025</a:t>
             </a:fld>
             <a:endParaRPr lang="en-US"/>
           </a:p>
@@ -3637,7 +3572,7 @@
           <p:cNvPr id="5" name="Footer Placeholder 4">
             <a:extLst>
               <a:ext uri="{FF2B5EF4-FFF2-40B4-BE49-F238E27FC236}">
-                <a16:creationId xmlns:a16="http://schemas.microsoft.com/office/drawing/2014/main" xmlns="" id="{47FD1F31-42DA-CEF8-7C31-2FE5C9C7BCD4}"/>
+                <a16:creationId xmlns:a16="http://schemas.microsoft.com/office/drawing/2014/main" id="{47FD1F31-42DA-CEF8-7C31-2FE5C9C7BCD4}"/>
               </a:ext>
             </a:extLst>
           </p:cNvPr>
@@ -3662,7 +3597,7 @@
           <p:cNvPr id="6" name="Slide Number Placeholder 5">
             <a:extLst>
               <a:ext uri="{FF2B5EF4-FFF2-40B4-BE49-F238E27FC236}">
-                <a16:creationId xmlns:a16="http://schemas.microsoft.com/office/drawing/2014/main" xmlns="" id="{92E5D5D1-FB97-DE8E-048C-D6AAF7F46242}"/>
+                <a16:creationId xmlns:a16="http://schemas.microsoft.com/office/drawing/2014/main" id="{92E5D5D1-FB97-DE8E-048C-D6AAF7F46242}"/>
               </a:ext>
             </a:extLst>
           </p:cNvPr>
@@ -3721,7 +3656,7 @@
           <p:cNvPr id="2" name="Vertical Title 1">
             <a:extLst>
               <a:ext uri="{FF2B5EF4-FFF2-40B4-BE49-F238E27FC236}">
-                <a16:creationId xmlns:a16="http://schemas.microsoft.com/office/drawing/2014/main" xmlns="" id="{2D7DB59B-F8E1-798D-4567-29D63624F2F0}"/>
+                <a16:creationId xmlns:a16="http://schemas.microsoft.com/office/drawing/2014/main" id="{2D7DB59B-F8E1-798D-4567-29D63624F2F0}"/>
               </a:ext>
             </a:extLst>
           </p:cNvPr>
@@ -3754,7 +3689,7 @@
           <p:cNvPr id="3" name="Vertical Text Placeholder 2">
             <a:extLst>
               <a:ext uri="{FF2B5EF4-FFF2-40B4-BE49-F238E27FC236}">
-                <a16:creationId xmlns:a16="http://schemas.microsoft.com/office/drawing/2014/main" xmlns="" id="{3D30055A-A874-87BD-49CF-9E29AF55F145}"/>
+                <a16:creationId xmlns:a16="http://schemas.microsoft.com/office/drawing/2014/main" id="{3D30055A-A874-87BD-49CF-9E29AF55F145}"/>
               </a:ext>
             </a:extLst>
           </p:cNvPr>
@@ -3816,7 +3751,7 @@
           <p:cNvPr id="4" name="Date Placeholder 3">
             <a:extLst>
               <a:ext uri="{FF2B5EF4-FFF2-40B4-BE49-F238E27FC236}">
-                <a16:creationId xmlns:a16="http://schemas.microsoft.com/office/drawing/2014/main" xmlns="" id="{9B3DBADC-D37D-C6C2-7AC8-D51B5F060832}"/>
+                <a16:creationId xmlns:a16="http://schemas.microsoft.com/office/drawing/2014/main" id="{9B3DBADC-D37D-C6C2-7AC8-D51B5F060832}"/>
               </a:ext>
             </a:extLst>
           </p:cNvPr>
@@ -3834,7 +3769,7 @@
           <a:p>
             <a:fld id="{51DA3061-A0A7-4F4A-8031-9CD73C4CB18A}" type="datetimeFigureOut">
               <a:rPr lang="en-US" smtClean="0"/>
-              <a:t>05-08-2024</a:t>
+              <a:t>12/1/2025</a:t>
             </a:fld>
             <a:endParaRPr lang="en-US"/>
           </a:p>
@@ -3845,7 +3780,7 @@
           <p:cNvPr id="5" name="Footer Placeholder 4">
             <a:extLst>
               <a:ext uri="{FF2B5EF4-FFF2-40B4-BE49-F238E27FC236}">
-                <a16:creationId xmlns:a16="http://schemas.microsoft.com/office/drawing/2014/main" xmlns="" id="{4506517F-A111-2C81-DF40-6EEBF4104BBC}"/>
+                <a16:creationId xmlns:a16="http://schemas.microsoft.com/office/drawing/2014/main" id="{4506517F-A111-2C81-DF40-6EEBF4104BBC}"/>
               </a:ext>
             </a:extLst>
           </p:cNvPr>
@@ -3870,7 +3805,7 @@
           <p:cNvPr id="6" name="Slide Number Placeholder 5">
             <a:extLst>
               <a:ext uri="{FF2B5EF4-FFF2-40B4-BE49-F238E27FC236}">
-                <a16:creationId xmlns:a16="http://schemas.microsoft.com/office/drawing/2014/main" xmlns="" id="{4383F332-48DE-4695-4DFE-5D4444A27298}"/>
+                <a16:creationId xmlns:a16="http://schemas.microsoft.com/office/drawing/2014/main" id="{4383F332-48DE-4695-4DFE-5D4444A27298}"/>
               </a:ext>
             </a:extLst>
           </p:cNvPr>
@@ -3929,7 +3864,7 @@
           <p:cNvPr id="2" name="Title 1">
             <a:extLst>
               <a:ext uri="{FF2B5EF4-FFF2-40B4-BE49-F238E27FC236}">
-                <a16:creationId xmlns:a16="http://schemas.microsoft.com/office/drawing/2014/main" xmlns="" id="{E5A33689-1DDC-2D66-94C6-7A5C80173A7C}"/>
+                <a16:creationId xmlns:a16="http://schemas.microsoft.com/office/drawing/2014/main" id="{E5A33689-1DDC-2D66-94C6-7A5C80173A7C}"/>
               </a:ext>
             </a:extLst>
           </p:cNvPr>
@@ -3957,7 +3892,7 @@
           <p:cNvPr id="3" name="Content Placeholder 2">
             <a:extLst>
               <a:ext uri="{FF2B5EF4-FFF2-40B4-BE49-F238E27FC236}">
-                <a16:creationId xmlns:a16="http://schemas.microsoft.com/office/drawing/2014/main" xmlns="" id="{DFE92CA6-5EDA-7367-1C13-271004FFFEC7}"/>
+                <a16:creationId xmlns:a16="http://schemas.microsoft.com/office/drawing/2014/main" id="{DFE92CA6-5EDA-7367-1C13-271004FFFEC7}"/>
               </a:ext>
             </a:extLst>
           </p:cNvPr>
@@ -4014,7 +3949,7 @@
           <p:cNvPr id="4" name="Date Placeholder 3">
             <a:extLst>
               <a:ext uri="{FF2B5EF4-FFF2-40B4-BE49-F238E27FC236}">
-                <a16:creationId xmlns:a16="http://schemas.microsoft.com/office/drawing/2014/main" xmlns="" id="{F3878A9F-99A7-B8C2-3BAB-455DA8222057}"/>
+                <a16:creationId xmlns:a16="http://schemas.microsoft.com/office/drawing/2014/main" id="{F3878A9F-99A7-B8C2-3BAB-455DA8222057}"/>
               </a:ext>
             </a:extLst>
           </p:cNvPr>
@@ -4032,7 +3967,7 @@
           <a:p>
             <a:fld id="{51DA3061-A0A7-4F4A-8031-9CD73C4CB18A}" type="datetimeFigureOut">
               <a:rPr lang="en-US" smtClean="0"/>
-              <a:t>05-08-2024</a:t>
+              <a:t>12/1/2025</a:t>
             </a:fld>
             <a:endParaRPr lang="en-US"/>
           </a:p>
@@ -4043,7 +3978,7 @@
           <p:cNvPr id="5" name="Footer Placeholder 4">
             <a:extLst>
               <a:ext uri="{FF2B5EF4-FFF2-40B4-BE49-F238E27FC236}">
-                <a16:creationId xmlns:a16="http://schemas.microsoft.com/office/drawing/2014/main" xmlns="" id="{32D0478F-4B0C-5552-DEB5-42B4BC995434}"/>
+                <a16:creationId xmlns:a16="http://schemas.microsoft.com/office/drawing/2014/main" id="{32D0478F-4B0C-5552-DEB5-42B4BC995434}"/>
               </a:ext>
             </a:extLst>
           </p:cNvPr>
@@ -4068,7 +4003,7 @@
           <p:cNvPr id="6" name="Slide Number Placeholder 5">
             <a:extLst>
               <a:ext uri="{FF2B5EF4-FFF2-40B4-BE49-F238E27FC236}">
-                <a16:creationId xmlns:a16="http://schemas.microsoft.com/office/drawing/2014/main" xmlns="" id="{6A1CC29E-2B64-36B7-14C9-BA066C02453A}"/>
+                <a16:creationId xmlns:a16="http://schemas.microsoft.com/office/drawing/2014/main" id="{6A1CC29E-2B64-36B7-14C9-BA066C02453A}"/>
               </a:ext>
             </a:extLst>
           </p:cNvPr>
@@ -4127,7 +4062,7 @@
           <p:cNvPr id="2" name="Title 1">
             <a:extLst>
               <a:ext uri="{FF2B5EF4-FFF2-40B4-BE49-F238E27FC236}">
-                <a16:creationId xmlns:a16="http://schemas.microsoft.com/office/drawing/2014/main" xmlns="" id="{5CC22734-D97D-0994-902C-C0FC50B7D0C8}"/>
+                <a16:creationId xmlns:a16="http://schemas.microsoft.com/office/drawing/2014/main" id="{5CC22734-D97D-0994-902C-C0FC50B7D0C8}"/>
               </a:ext>
             </a:extLst>
           </p:cNvPr>
@@ -4164,7 +4099,7 @@
           <p:cNvPr id="3" name="Text Placeholder 2">
             <a:extLst>
               <a:ext uri="{FF2B5EF4-FFF2-40B4-BE49-F238E27FC236}">
-                <a16:creationId xmlns:a16="http://schemas.microsoft.com/office/drawing/2014/main" xmlns="" id="{07FD1D3B-6080-889C-5682-035BB6E3B7A3}"/>
+                <a16:creationId xmlns:a16="http://schemas.microsoft.com/office/drawing/2014/main" id="{07FD1D3B-6080-889C-5682-035BB6E3B7A3}"/>
               </a:ext>
             </a:extLst>
           </p:cNvPr>
@@ -4289,7 +4224,7 @@
           <p:cNvPr id="4" name="Date Placeholder 3">
             <a:extLst>
               <a:ext uri="{FF2B5EF4-FFF2-40B4-BE49-F238E27FC236}">
-                <a16:creationId xmlns:a16="http://schemas.microsoft.com/office/drawing/2014/main" xmlns="" id="{F14A0E69-7629-5CAB-967A-BC5057B2B19B}"/>
+                <a16:creationId xmlns:a16="http://schemas.microsoft.com/office/drawing/2014/main" id="{F14A0E69-7629-5CAB-967A-BC5057B2B19B}"/>
               </a:ext>
             </a:extLst>
           </p:cNvPr>
@@ -4307,7 +4242,7 @@
           <a:p>
             <a:fld id="{51DA3061-A0A7-4F4A-8031-9CD73C4CB18A}" type="datetimeFigureOut">
               <a:rPr lang="en-US" smtClean="0"/>
-              <a:t>05-08-2024</a:t>
+              <a:t>12/1/2025</a:t>
             </a:fld>
             <a:endParaRPr lang="en-US"/>
           </a:p>
@@ -4318,7 +4253,7 @@
           <p:cNvPr id="5" name="Footer Placeholder 4">
             <a:extLst>
               <a:ext uri="{FF2B5EF4-FFF2-40B4-BE49-F238E27FC236}">
-                <a16:creationId xmlns:a16="http://schemas.microsoft.com/office/drawing/2014/main" xmlns="" id="{37F38841-8C7E-BA64-9EA1-7A3DA64B89EC}"/>
+                <a16:creationId xmlns:a16="http://schemas.microsoft.com/office/drawing/2014/main" id="{37F38841-8C7E-BA64-9EA1-7A3DA64B89EC}"/>
               </a:ext>
             </a:extLst>
           </p:cNvPr>
@@ -4343,7 +4278,7 @@
           <p:cNvPr id="6" name="Slide Number Placeholder 5">
             <a:extLst>
               <a:ext uri="{FF2B5EF4-FFF2-40B4-BE49-F238E27FC236}">
-                <a16:creationId xmlns:a16="http://schemas.microsoft.com/office/drawing/2014/main" xmlns="" id="{EFE2AAC5-B5BC-AACE-DB44-0F85C444C341}"/>
+                <a16:creationId xmlns:a16="http://schemas.microsoft.com/office/drawing/2014/main" id="{EFE2AAC5-B5BC-AACE-DB44-0F85C444C341}"/>
               </a:ext>
             </a:extLst>
           </p:cNvPr>
@@ -4402,7 +4337,7 @@
           <p:cNvPr id="2" name="Title 1">
             <a:extLst>
               <a:ext uri="{FF2B5EF4-FFF2-40B4-BE49-F238E27FC236}">
-                <a16:creationId xmlns:a16="http://schemas.microsoft.com/office/drawing/2014/main" xmlns="" id="{D47F9ADF-45B5-AB05-CF01-C40EB00927F1}"/>
+                <a16:creationId xmlns:a16="http://schemas.microsoft.com/office/drawing/2014/main" id="{D47F9ADF-45B5-AB05-CF01-C40EB00927F1}"/>
               </a:ext>
             </a:extLst>
           </p:cNvPr>
@@ -4430,7 +4365,7 @@
           <p:cNvPr id="3" name="Content Placeholder 2">
             <a:extLst>
               <a:ext uri="{FF2B5EF4-FFF2-40B4-BE49-F238E27FC236}">
-                <a16:creationId xmlns:a16="http://schemas.microsoft.com/office/drawing/2014/main" xmlns="" id="{6251445B-0F85-3064-D5EE-680D03E2336E}"/>
+                <a16:creationId xmlns:a16="http://schemas.microsoft.com/office/drawing/2014/main" id="{6251445B-0F85-3064-D5EE-680D03E2336E}"/>
               </a:ext>
             </a:extLst>
           </p:cNvPr>
@@ -4492,7 +4427,7 @@
           <p:cNvPr id="4" name="Content Placeholder 3">
             <a:extLst>
               <a:ext uri="{FF2B5EF4-FFF2-40B4-BE49-F238E27FC236}">
-                <a16:creationId xmlns:a16="http://schemas.microsoft.com/office/drawing/2014/main" xmlns="" id="{23C7050E-5A40-9DBC-3C7D-E4DC5B2DEDD1}"/>
+                <a16:creationId xmlns:a16="http://schemas.microsoft.com/office/drawing/2014/main" id="{23C7050E-5A40-9DBC-3C7D-E4DC5B2DEDD1}"/>
               </a:ext>
             </a:extLst>
           </p:cNvPr>
@@ -4554,7 +4489,7 @@
           <p:cNvPr id="5" name="Date Placeholder 4">
             <a:extLst>
               <a:ext uri="{FF2B5EF4-FFF2-40B4-BE49-F238E27FC236}">
-                <a16:creationId xmlns:a16="http://schemas.microsoft.com/office/drawing/2014/main" xmlns="" id="{FC81E5AD-41F9-13E0-ADCB-FD6C8266F3F7}"/>
+                <a16:creationId xmlns:a16="http://schemas.microsoft.com/office/drawing/2014/main" id="{FC81E5AD-41F9-13E0-ADCB-FD6C8266F3F7}"/>
               </a:ext>
             </a:extLst>
           </p:cNvPr>
@@ -4572,7 +4507,7 @@
           <a:p>
             <a:fld id="{51DA3061-A0A7-4F4A-8031-9CD73C4CB18A}" type="datetimeFigureOut">
               <a:rPr lang="en-US" smtClean="0"/>
-              <a:t>05-08-2024</a:t>
+              <a:t>12/1/2025</a:t>
             </a:fld>
             <a:endParaRPr lang="en-US"/>
           </a:p>
@@ -4583,7 +4518,7 @@
           <p:cNvPr id="6" name="Footer Placeholder 5">
             <a:extLst>
               <a:ext uri="{FF2B5EF4-FFF2-40B4-BE49-F238E27FC236}">
-                <a16:creationId xmlns:a16="http://schemas.microsoft.com/office/drawing/2014/main" xmlns="" id="{0F95F057-B9E1-6218-38B9-D47A2714BA0B}"/>
+                <a16:creationId xmlns:a16="http://schemas.microsoft.com/office/drawing/2014/main" id="{0F95F057-B9E1-6218-38B9-D47A2714BA0B}"/>
               </a:ext>
             </a:extLst>
           </p:cNvPr>
@@ -4608,7 +4543,7 @@
           <p:cNvPr id="7" name="Slide Number Placeholder 6">
             <a:extLst>
               <a:ext uri="{FF2B5EF4-FFF2-40B4-BE49-F238E27FC236}">
-                <a16:creationId xmlns:a16="http://schemas.microsoft.com/office/drawing/2014/main" xmlns="" id="{B7C271CA-17F0-6EBB-EF6D-9C2907F17CEF}"/>
+                <a16:creationId xmlns:a16="http://schemas.microsoft.com/office/drawing/2014/main" id="{B7C271CA-17F0-6EBB-EF6D-9C2907F17CEF}"/>
               </a:ext>
             </a:extLst>
           </p:cNvPr>
@@ -4667,7 +4602,7 @@
           <p:cNvPr id="2" name="Title 1">
             <a:extLst>
               <a:ext uri="{FF2B5EF4-FFF2-40B4-BE49-F238E27FC236}">
-                <a16:creationId xmlns:a16="http://schemas.microsoft.com/office/drawing/2014/main" xmlns="" id="{C8861BF1-B044-F589-AD66-26BCFA238CFA}"/>
+                <a16:creationId xmlns:a16="http://schemas.microsoft.com/office/drawing/2014/main" id="{C8861BF1-B044-F589-AD66-26BCFA238CFA}"/>
               </a:ext>
             </a:extLst>
           </p:cNvPr>
@@ -4700,7 +4635,7 @@
           <p:cNvPr id="3" name="Text Placeholder 2">
             <a:extLst>
               <a:ext uri="{FF2B5EF4-FFF2-40B4-BE49-F238E27FC236}">
-                <a16:creationId xmlns:a16="http://schemas.microsoft.com/office/drawing/2014/main" xmlns="" id="{727C515A-6781-9C22-87BA-640CAA020601}"/>
+                <a16:creationId xmlns:a16="http://schemas.microsoft.com/office/drawing/2014/main" id="{727C515A-6781-9C22-87BA-640CAA020601}"/>
               </a:ext>
             </a:extLst>
           </p:cNvPr>
@@ -4771,7 +4706,7 @@
           <p:cNvPr id="4" name="Content Placeholder 3">
             <a:extLst>
               <a:ext uri="{FF2B5EF4-FFF2-40B4-BE49-F238E27FC236}">
-                <a16:creationId xmlns:a16="http://schemas.microsoft.com/office/drawing/2014/main" xmlns="" id="{813CD64B-A977-44B4-CB6C-1342CCD83A91}"/>
+                <a16:creationId xmlns:a16="http://schemas.microsoft.com/office/drawing/2014/main" id="{813CD64B-A977-44B4-CB6C-1342CCD83A91}"/>
               </a:ext>
             </a:extLst>
           </p:cNvPr>
@@ -4833,7 +4768,7 @@
           <p:cNvPr id="5" name="Text Placeholder 4">
             <a:extLst>
               <a:ext uri="{FF2B5EF4-FFF2-40B4-BE49-F238E27FC236}">
-                <a16:creationId xmlns:a16="http://schemas.microsoft.com/office/drawing/2014/main" xmlns="" id="{DC3AF2F2-7DDC-D439-6CC0-A99CC52F18D8}"/>
+                <a16:creationId xmlns:a16="http://schemas.microsoft.com/office/drawing/2014/main" id="{DC3AF2F2-7DDC-D439-6CC0-A99CC52F18D8}"/>
               </a:ext>
             </a:extLst>
           </p:cNvPr>
@@ -4904,7 +4839,7 @@
           <p:cNvPr id="6" name="Content Placeholder 5">
             <a:extLst>
               <a:ext uri="{FF2B5EF4-FFF2-40B4-BE49-F238E27FC236}">
-                <a16:creationId xmlns:a16="http://schemas.microsoft.com/office/drawing/2014/main" xmlns="" id="{CDF4160B-0C12-A534-33B9-B3EA6F936F03}"/>
+                <a16:creationId xmlns:a16="http://schemas.microsoft.com/office/drawing/2014/main" id="{CDF4160B-0C12-A534-33B9-B3EA6F936F03}"/>
               </a:ext>
             </a:extLst>
           </p:cNvPr>
@@ -4966,7 +4901,7 @@
           <p:cNvPr id="7" name="Date Placeholder 6">
             <a:extLst>
               <a:ext uri="{FF2B5EF4-FFF2-40B4-BE49-F238E27FC236}">
-                <a16:creationId xmlns:a16="http://schemas.microsoft.com/office/drawing/2014/main" xmlns="" id="{81934449-E82A-B80A-3A1A-579331A6D3D0}"/>
+                <a16:creationId xmlns:a16="http://schemas.microsoft.com/office/drawing/2014/main" id="{81934449-E82A-B80A-3A1A-579331A6D3D0}"/>
               </a:ext>
             </a:extLst>
           </p:cNvPr>
@@ -4984,7 +4919,7 @@
           <a:p>
             <a:fld id="{51DA3061-A0A7-4F4A-8031-9CD73C4CB18A}" type="datetimeFigureOut">
               <a:rPr lang="en-US" smtClean="0"/>
-              <a:t>05-08-2024</a:t>
+              <a:t>12/1/2025</a:t>
             </a:fld>
             <a:endParaRPr lang="en-US"/>
           </a:p>
@@ -4995,7 +4930,7 @@
           <p:cNvPr id="8" name="Footer Placeholder 7">
             <a:extLst>
               <a:ext uri="{FF2B5EF4-FFF2-40B4-BE49-F238E27FC236}">
-                <a16:creationId xmlns:a16="http://schemas.microsoft.com/office/drawing/2014/main" xmlns="" id="{B4A08AF9-A976-9A15-8A18-D775D9707FD4}"/>
+                <a16:creationId xmlns:a16="http://schemas.microsoft.com/office/drawing/2014/main" id="{B4A08AF9-A976-9A15-8A18-D775D9707FD4}"/>
               </a:ext>
             </a:extLst>
           </p:cNvPr>
@@ -5020,7 +4955,7 @@
           <p:cNvPr id="9" name="Slide Number Placeholder 8">
             <a:extLst>
               <a:ext uri="{FF2B5EF4-FFF2-40B4-BE49-F238E27FC236}">
-                <a16:creationId xmlns:a16="http://schemas.microsoft.com/office/drawing/2014/main" xmlns="" id="{D08E5E89-B506-6DBA-0F19-FF4641DFEB7A}"/>
+                <a16:creationId xmlns:a16="http://schemas.microsoft.com/office/drawing/2014/main" id="{D08E5E89-B506-6DBA-0F19-FF4641DFEB7A}"/>
               </a:ext>
             </a:extLst>
           </p:cNvPr>
@@ -5079,7 +5014,7 @@
           <p:cNvPr id="2" name="Title 1">
             <a:extLst>
               <a:ext uri="{FF2B5EF4-FFF2-40B4-BE49-F238E27FC236}">
-                <a16:creationId xmlns:a16="http://schemas.microsoft.com/office/drawing/2014/main" xmlns="" id="{23BC139F-7764-6F34-6D6B-385A5D8CCAD3}"/>
+                <a16:creationId xmlns:a16="http://schemas.microsoft.com/office/drawing/2014/main" id="{23BC139F-7764-6F34-6D6B-385A5D8CCAD3}"/>
               </a:ext>
             </a:extLst>
           </p:cNvPr>
@@ -5107,7 +5042,7 @@
           <p:cNvPr id="3" name="Date Placeholder 2">
             <a:extLst>
               <a:ext uri="{FF2B5EF4-FFF2-40B4-BE49-F238E27FC236}">
-                <a16:creationId xmlns:a16="http://schemas.microsoft.com/office/drawing/2014/main" xmlns="" id="{616A0A82-9D9E-5502-FFDE-050228984F81}"/>
+                <a16:creationId xmlns:a16="http://schemas.microsoft.com/office/drawing/2014/main" id="{616A0A82-9D9E-5502-FFDE-050228984F81}"/>
               </a:ext>
             </a:extLst>
           </p:cNvPr>
@@ -5125,7 +5060,7 @@
           <a:p>
             <a:fld id="{51DA3061-A0A7-4F4A-8031-9CD73C4CB18A}" type="datetimeFigureOut">
               <a:rPr lang="en-US" smtClean="0"/>
-              <a:t>05-08-2024</a:t>
+              <a:t>12/1/2025</a:t>
             </a:fld>
             <a:endParaRPr lang="en-US"/>
           </a:p>
@@ -5136,7 +5071,7 @@
           <p:cNvPr id="4" name="Footer Placeholder 3">
             <a:extLst>
               <a:ext uri="{FF2B5EF4-FFF2-40B4-BE49-F238E27FC236}">
-                <a16:creationId xmlns:a16="http://schemas.microsoft.com/office/drawing/2014/main" xmlns="" id="{2DE52D9E-FEDE-6F6A-D6C7-B373D97810C1}"/>
+                <a16:creationId xmlns:a16="http://schemas.microsoft.com/office/drawing/2014/main" id="{2DE52D9E-FEDE-6F6A-D6C7-B373D97810C1}"/>
               </a:ext>
             </a:extLst>
           </p:cNvPr>
@@ -5161,7 +5096,7 @@
           <p:cNvPr id="5" name="Slide Number Placeholder 4">
             <a:extLst>
               <a:ext uri="{FF2B5EF4-FFF2-40B4-BE49-F238E27FC236}">
-                <a16:creationId xmlns:a16="http://schemas.microsoft.com/office/drawing/2014/main" xmlns="" id="{097B3870-F395-02DA-2441-0FC6D786ECAB}"/>
+                <a16:creationId xmlns:a16="http://schemas.microsoft.com/office/drawing/2014/main" id="{097B3870-F395-02DA-2441-0FC6D786ECAB}"/>
               </a:ext>
             </a:extLst>
           </p:cNvPr>
@@ -5220,7 +5155,7 @@
           <p:cNvPr id="2" name="Date Placeholder 1">
             <a:extLst>
               <a:ext uri="{FF2B5EF4-FFF2-40B4-BE49-F238E27FC236}">
-                <a16:creationId xmlns:a16="http://schemas.microsoft.com/office/drawing/2014/main" xmlns="" id="{CE15A386-C440-4C36-D676-F524069C2C05}"/>
+                <a16:creationId xmlns:a16="http://schemas.microsoft.com/office/drawing/2014/main" id="{CE15A386-C440-4C36-D676-F524069C2C05}"/>
               </a:ext>
             </a:extLst>
           </p:cNvPr>
@@ -5238,7 +5173,7 @@
           <a:p>
             <a:fld id="{51DA3061-A0A7-4F4A-8031-9CD73C4CB18A}" type="datetimeFigureOut">
               <a:rPr lang="en-US" smtClean="0"/>
-              <a:t>05-08-2024</a:t>
+              <a:t>12/1/2025</a:t>
             </a:fld>
             <a:endParaRPr lang="en-US"/>
           </a:p>
@@ -5249,7 +5184,7 @@
           <p:cNvPr id="3" name="Footer Placeholder 2">
             <a:extLst>
               <a:ext uri="{FF2B5EF4-FFF2-40B4-BE49-F238E27FC236}">
-                <a16:creationId xmlns:a16="http://schemas.microsoft.com/office/drawing/2014/main" xmlns="" id="{2B0C9D52-183B-9135-592A-844BD5DA5E5F}"/>
+                <a16:creationId xmlns:a16="http://schemas.microsoft.com/office/drawing/2014/main" id="{2B0C9D52-183B-9135-592A-844BD5DA5E5F}"/>
               </a:ext>
             </a:extLst>
           </p:cNvPr>
@@ -5274,7 +5209,7 @@
           <p:cNvPr id="4" name="Slide Number Placeholder 3">
             <a:extLst>
               <a:ext uri="{FF2B5EF4-FFF2-40B4-BE49-F238E27FC236}">
-                <a16:creationId xmlns:a16="http://schemas.microsoft.com/office/drawing/2014/main" xmlns="" id="{AF22221B-D4EC-07AE-1BBF-53C90DCD304F}"/>
+                <a16:creationId xmlns:a16="http://schemas.microsoft.com/office/drawing/2014/main" id="{AF22221B-D4EC-07AE-1BBF-53C90DCD304F}"/>
               </a:ext>
             </a:extLst>
           </p:cNvPr>
@@ -5333,7 +5268,7 @@
           <p:cNvPr id="2" name="Title 1">
             <a:extLst>
               <a:ext uri="{FF2B5EF4-FFF2-40B4-BE49-F238E27FC236}">
-                <a16:creationId xmlns:a16="http://schemas.microsoft.com/office/drawing/2014/main" xmlns="" id="{002D3251-D2F2-9896-0D9F-474849EA8799}"/>
+                <a16:creationId xmlns:a16="http://schemas.microsoft.com/office/drawing/2014/main" id="{002D3251-D2F2-9896-0D9F-474849EA8799}"/>
               </a:ext>
             </a:extLst>
           </p:cNvPr>
@@ -5370,7 +5305,7 @@
           <p:cNvPr id="3" name="Content Placeholder 2">
             <a:extLst>
               <a:ext uri="{FF2B5EF4-FFF2-40B4-BE49-F238E27FC236}">
-                <a16:creationId xmlns:a16="http://schemas.microsoft.com/office/drawing/2014/main" xmlns="" id="{4A6DB55F-AE65-9F11-AC3F-12085E6B9FB1}"/>
+                <a16:creationId xmlns:a16="http://schemas.microsoft.com/office/drawing/2014/main" id="{4A6DB55F-AE65-9F11-AC3F-12085E6B9FB1}"/>
               </a:ext>
             </a:extLst>
           </p:cNvPr>
@@ -5460,7 +5395,7 @@
           <p:cNvPr id="4" name="Text Placeholder 3">
             <a:extLst>
               <a:ext uri="{FF2B5EF4-FFF2-40B4-BE49-F238E27FC236}">
-                <a16:creationId xmlns:a16="http://schemas.microsoft.com/office/drawing/2014/main" xmlns="" id="{4FB7A120-E990-1ECA-8FA6-431D9F433A9A}"/>
+                <a16:creationId xmlns:a16="http://schemas.microsoft.com/office/drawing/2014/main" id="{4FB7A120-E990-1ECA-8FA6-431D9F433A9A}"/>
               </a:ext>
             </a:extLst>
           </p:cNvPr>
@@ -5531,7 +5466,7 @@
           <p:cNvPr id="5" name="Date Placeholder 4">
             <a:extLst>
               <a:ext uri="{FF2B5EF4-FFF2-40B4-BE49-F238E27FC236}">
-                <a16:creationId xmlns:a16="http://schemas.microsoft.com/office/drawing/2014/main" xmlns="" id="{39EBF1A9-E0A7-182D-62CE-F84535E66F5A}"/>
+                <a16:creationId xmlns:a16="http://schemas.microsoft.com/office/drawing/2014/main" id="{39EBF1A9-E0A7-182D-62CE-F84535E66F5A}"/>
               </a:ext>
             </a:extLst>
           </p:cNvPr>
@@ -5549,7 +5484,7 @@
           <a:p>
             <a:fld id="{51DA3061-A0A7-4F4A-8031-9CD73C4CB18A}" type="datetimeFigureOut">
               <a:rPr lang="en-US" smtClean="0"/>
-              <a:t>05-08-2024</a:t>
+              <a:t>12/1/2025</a:t>
             </a:fld>
             <a:endParaRPr lang="en-US"/>
           </a:p>
@@ -5560,7 +5495,7 @@
           <p:cNvPr id="6" name="Footer Placeholder 5">
             <a:extLst>
               <a:ext uri="{FF2B5EF4-FFF2-40B4-BE49-F238E27FC236}">
-                <a16:creationId xmlns:a16="http://schemas.microsoft.com/office/drawing/2014/main" xmlns="" id="{550525FC-9B0C-B0DE-5457-4A48E2189261}"/>
+                <a16:creationId xmlns:a16="http://schemas.microsoft.com/office/drawing/2014/main" id="{550525FC-9B0C-B0DE-5457-4A48E2189261}"/>
               </a:ext>
             </a:extLst>
           </p:cNvPr>
@@ -5585,7 +5520,7 @@
           <p:cNvPr id="7" name="Slide Number Placeholder 6">
             <a:extLst>
               <a:ext uri="{FF2B5EF4-FFF2-40B4-BE49-F238E27FC236}">
-                <a16:creationId xmlns:a16="http://schemas.microsoft.com/office/drawing/2014/main" xmlns="" id="{B2929B76-1A73-67DA-F9A1-3C53EDFA988F}"/>
+                <a16:creationId xmlns:a16="http://schemas.microsoft.com/office/drawing/2014/main" id="{B2929B76-1A73-67DA-F9A1-3C53EDFA988F}"/>
               </a:ext>
             </a:extLst>
           </p:cNvPr>
@@ -5644,7 +5579,7 @@
           <p:cNvPr id="2" name="Title 1">
             <a:extLst>
               <a:ext uri="{FF2B5EF4-FFF2-40B4-BE49-F238E27FC236}">
-                <a16:creationId xmlns:a16="http://schemas.microsoft.com/office/drawing/2014/main" xmlns="" id="{33FE9A64-4A89-9591-135E-9BDE61A0D273}"/>
+                <a16:creationId xmlns:a16="http://schemas.microsoft.com/office/drawing/2014/main" id="{33FE9A64-4A89-9591-135E-9BDE61A0D273}"/>
               </a:ext>
             </a:extLst>
           </p:cNvPr>
@@ -5681,7 +5616,7 @@
           <p:cNvPr id="3" name="Picture Placeholder 2">
             <a:extLst>
               <a:ext uri="{FF2B5EF4-FFF2-40B4-BE49-F238E27FC236}">
-                <a16:creationId xmlns:a16="http://schemas.microsoft.com/office/drawing/2014/main" xmlns="" id="{243FDB0E-B0B3-CFDB-AB84-8A348E7462D1}"/>
+                <a16:creationId xmlns:a16="http://schemas.microsoft.com/office/drawing/2014/main" id="{243FDB0E-B0B3-CFDB-AB84-8A348E7462D1}"/>
               </a:ext>
             </a:extLst>
           </p:cNvPr>
@@ -5748,7 +5683,7 @@
           <p:cNvPr id="4" name="Text Placeholder 3">
             <a:extLst>
               <a:ext uri="{FF2B5EF4-FFF2-40B4-BE49-F238E27FC236}">
-                <a16:creationId xmlns:a16="http://schemas.microsoft.com/office/drawing/2014/main" xmlns="" id="{C7EAB411-567B-9C3A-922D-075D9F4AF076}"/>
+                <a16:creationId xmlns:a16="http://schemas.microsoft.com/office/drawing/2014/main" id="{C7EAB411-567B-9C3A-922D-075D9F4AF076}"/>
               </a:ext>
             </a:extLst>
           </p:cNvPr>
@@ -5819,7 +5754,7 @@
           <p:cNvPr id="5" name="Date Placeholder 4">
             <a:extLst>
               <a:ext uri="{FF2B5EF4-FFF2-40B4-BE49-F238E27FC236}">
-                <a16:creationId xmlns:a16="http://schemas.microsoft.com/office/drawing/2014/main" xmlns="" id="{BD9E2927-82DC-0011-E936-C6C998E7CCC1}"/>
+                <a16:creationId xmlns:a16="http://schemas.microsoft.com/office/drawing/2014/main" id="{BD9E2927-82DC-0011-E936-C6C998E7CCC1}"/>
               </a:ext>
             </a:extLst>
           </p:cNvPr>
@@ -5837,7 +5772,7 @@
           <a:p>
             <a:fld id="{51DA3061-A0A7-4F4A-8031-9CD73C4CB18A}" type="datetimeFigureOut">
               <a:rPr lang="en-US" smtClean="0"/>
-              <a:t>05-08-2024</a:t>
+              <a:t>12/1/2025</a:t>
             </a:fld>
             <a:endParaRPr lang="en-US"/>
           </a:p>
@@ -5848,7 +5783,7 @@
           <p:cNvPr id="6" name="Footer Placeholder 5">
             <a:extLst>
               <a:ext uri="{FF2B5EF4-FFF2-40B4-BE49-F238E27FC236}">
-                <a16:creationId xmlns:a16="http://schemas.microsoft.com/office/drawing/2014/main" xmlns="" id="{009C1ACB-F72D-D1C7-3C75-C05D2EECA27F}"/>
+                <a16:creationId xmlns:a16="http://schemas.microsoft.com/office/drawing/2014/main" id="{009C1ACB-F72D-D1C7-3C75-C05D2EECA27F}"/>
               </a:ext>
             </a:extLst>
           </p:cNvPr>
@@ -5873,7 +5808,7 @@
           <p:cNvPr id="7" name="Slide Number Placeholder 6">
             <a:extLst>
               <a:ext uri="{FF2B5EF4-FFF2-40B4-BE49-F238E27FC236}">
-                <a16:creationId xmlns:a16="http://schemas.microsoft.com/office/drawing/2014/main" xmlns="" id="{051D8083-9FBF-CA57-49A8-49ACA4FB741C}"/>
+                <a16:creationId xmlns:a16="http://schemas.microsoft.com/office/drawing/2014/main" id="{051D8083-9FBF-CA57-49A8-49ACA4FB741C}"/>
               </a:ext>
             </a:extLst>
           </p:cNvPr>
@@ -5940,7 +5875,7 @@
           <p:cNvPr id="2" name="Title Placeholder 1">
             <a:extLst>
               <a:ext uri="{FF2B5EF4-FFF2-40B4-BE49-F238E27FC236}">
-                <a16:creationId xmlns:a16="http://schemas.microsoft.com/office/drawing/2014/main" xmlns="" id="{BBE060C7-DFD0-5AB5-4A9B-196D17C24919}"/>
+                <a16:creationId xmlns:a16="http://schemas.microsoft.com/office/drawing/2014/main" id="{BBE060C7-DFD0-5AB5-4A9B-196D17C24919}"/>
               </a:ext>
             </a:extLst>
           </p:cNvPr>
@@ -5978,7 +5913,7 @@
           <p:cNvPr id="3" name="Text Placeholder 2">
             <a:extLst>
               <a:ext uri="{FF2B5EF4-FFF2-40B4-BE49-F238E27FC236}">
-                <a16:creationId xmlns:a16="http://schemas.microsoft.com/office/drawing/2014/main" xmlns="" id="{9C36E9E2-69CB-4CAA-C92A-3443D6FDB9AA}"/>
+                <a16:creationId xmlns:a16="http://schemas.microsoft.com/office/drawing/2014/main" id="{9C36E9E2-69CB-4CAA-C92A-3443D6FDB9AA}"/>
               </a:ext>
             </a:extLst>
           </p:cNvPr>
@@ -6045,7 +5980,7 @@
           <p:cNvPr id="4" name="Date Placeholder 3">
             <a:extLst>
               <a:ext uri="{FF2B5EF4-FFF2-40B4-BE49-F238E27FC236}">
-                <a16:creationId xmlns:a16="http://schemas.microsoft.com/office/drawing/2014/main" xmlns="" id="{330FBDA3-E66B-2C3E-9924-E7B27273D02D}"/>
+                <a16:creationId xmlns:a16="http://schemas.microsoft.com/office/drawing/2014/main" id="{330FBDA3-E66B-2C3E-9924-E7B27273D02D}"/>
               </a:ext>
             </a:extLst>
           </p:cNvPr>
@@ -6081,7 +6016,7 @@
           <a:p>
             <a:fld id="{51DA3061-A0A7-4F4A-8031-9CD73C4CB18A}" type="datetimeFigureOut">
               <a:rPr lang="en-US" smtClean="0"/>
-              <a:t>05-08-2024</a:t>
+              <a:t>12/1/2025</a:t>
             </a:fld>
             <a:endParaRPr lang="en-US"/>
           </a:p>
@@ -6092,7 +6027,7 @@
           <p:cNvPr id="5" name="Footer Placeholder 4">
             <a:extLst>
               <a:ext uri="{FF2B5EF4-FFF2-40B4-BE49-F238E27FC236}">
-                <a16:creationId xmlns:a16="http://schemas.microsoft.com/office/drawing/2014/main" xmlns="" id="{0B0CA2F5-C023-6FC5-12C8-90EF82D09CB4}"/>
+                <a16:creationId xmlns:a16="http://schemas.microsoft.com/office/drawing/2014/main" id="{0B0CA2F5-C023-6FC5-12C8-90EF82D09CB4}"/>
               </a:ext>
             </a:extLst>
           </p:cNvPr>
@@ -6135,7 +6070,7 @@
           <p:cNvPr id="6" name="Slide Number Placeholder 5">
             <a:extLst>
               <a:ext uri="{FF2B5EF4-FFF2-40B4-BE49-F238E27FC236}">
-                <a16:creationId xmlns:a16="http://schemas.microsoft.com/office/drawing/2014/main" xmlns="" id="{E601A392-ABD8-5699-7A5D-3D4CEBC6BA84}"/>
+                <a16:creationId xmlns:a16="http://schemas.microsoft.com/office/drawing/2014/main" id="{E601A392-ABD8-5699-7A5D-3D4CEBC6BA84}"/>
               </a:ext>
             </a:extLst>
           </p:cNvPr>
@@ -6503,7 +6438,7 @@
           <p:cNvPr id="2" name="Title 1">
             <a:extLst>
               <a:ext uri="{FF2B5EF4-FFF2-40B4-BE49-F238E27FC236}">
-                <a16:creationId xmlns:a16="http://schemas.microsoft.com/office/drawing/2014/main" xmlns="" id="{82E008CD-E3B2-E495-7BC7-1EDB51607F87}"/>
+                <a16:creationId xmlns:a16="http://schemas.microsoft.com/office/drawing/2014/main" id="{82E008CD-E3B2-E495-7BC7-1EDB51607F87}"/>
               </a:ext>
             </a:extLst>
           </p:cNvPr>
@@ -6527,14 +6462,13 @@
           <a:lstStyle/>
           <a:p>
             <a:r>
-              <a:rPr lang="en-US" dirty="0" err="1" smtClean="0"/>
+              <a:rPr lang="en-US" dirty="0" err="1"/>
               <a:t>VanArsdel</a:t>
             </a:r>
             <a:r>
-              <a:rPr lang="en-US" dirty="0" smtClean="0"/>
+              <a:rPr lang="en-US" dirty="0"/>
               <a:t>, Ltd.</a:t>
             </a:r>
-            <a:endParaRPr lang="en-US" dirty="0"/>
           </a:p>
         </p:txBody>
       </p:sp>
@@ -6543,7 +6477,7 @@
           <p:cNvPr id="3" name="Subtitle 2">
             <a:extLst>
               <a:ext uri="{FF2B5EF4-FFF2-40B4-BE49-F238E27FC236}">
-                <a16:creationId xmlns:a16="http://schemas.microsoft.com/office/drawing/2014/main" xmlns="" id="{247A2D2B-8FF2-D7CF-5D8C-6CC8E1439AA5}"/>
+                <a16:creationId xmlns:a16="http://schemas.microsoft.com/office/drawing/2014/main" id="{247A2D2B-8FF2-D7CF-5D8C-6CC8E1439AA5}"/>
               </a:ext>
             </a:extLst>
           </p:cNvPr>
@@ -6567,10 +6501,9 @@
           <a:lstStyle/>
           <a:p>
             <a:r>
-              <a:rPr lang="en-US" dirty="0" smtClean="0"/>
+              <a:rPr lang="en-US" dirty="0"/>
               <a:t>Fitness training designed for your lifestyle</a:t>
             </a:r>
-            <a:endParaRPr lang="en-US" dirty="0"/>
           </a:p>
         </p:txBody>
       </p:sp>
@@ -6681,7 +6614,7 @@
           <p:cNvPr id="2" name="Title 1">
             <a:extLst>
               <a:ext uri="{FF2B5EF4-FFF2-40B4-BE49-F238E27FC236}">
-                <a16:creationId xmlns:a16="http://schemas.microsoft.com/office/drawing/2014/main" xmlns="" id="{2265E5C6-9FDD-8F03-B3AF-114BEFC35A75}"/>
+                <a16:creationId xmlns:a16="http://schemas.microsoft.com/office/drawing/2014/main" id="{2265E5C6-9FDD-8F03-B3AF-114BEFC35A75}"/>
               </a:ext>
             </a:extLst>
           </p:cNvPr>
@@ -6697,35 +6630,48 @@
           <a:bodyPr/>
           <a:lstStyle/>
           <a:p>
-            <a:endParaRPr lang="en-US"/>
+            <a:r>
+              <a:rPr lang="en-US" dirty="0"/>
+              <a:t>YOGA </a:t>
+            </a:r>
           </a:p>
         </p:txBody>
       </p:sp>
-      <p:sp>
-        <p:nvSpPr>
-          <p:cNvPr id="3" name="Content Placeholder 2">
+      <p:pic>
+        <p:nvPicPr>
+          <p:cNvPr id="5" name="Content Placeholder 4">
             <a:extLst>
               <a:ext uri="{FF2B5EF4-FFF2-40B4-BE49-F238E27FC236}">
-                <a16:creationId xmlns:a16="http://schemas.microsoft.com/office/drawing/2014/main" xmlns="" id="{E2F6F496-2D56-8D19-D411-04494F4906E2}"/>
+                <a16:creationId xmlns:a16="http://schemas.microsoft.com/office/drawing/2014/main" id="{C9A2ABFC-9D21-B32A-CE63-F49D42543D9C}"/>
               </a:ext>
             </a:extLst>
           </p:cNvPr>
-          <p:cNvSpPr>
-            <a:spLocks noGrp="1"/>
-          </p:cNvSpPr>
+          <p:cNvPicPr>
+            <a:picLocks noGrp="1" noChangeAspect="1"/>
+          </p:cNvPicPr>
           <p:nvPr>
             <p:ph idx="1"/>
           </p:nvPr>
-        </p:nvSpPr>
-        <p:spPr/>
-        <p:txBody>
-          <a:bodyPr/>
-          <a:lstStyle/>
-          <a:p>
-            <a:endParaRPr lang="en-US"/>
-          </a:p>
-        </p:txBody>
-      </p:sp>
+        </p:nvPicPr>
+        <p:blipFill>
+          <a:blip r:embed="rId2">
+            <a:extLst>
+              <a:ext uri="{28A0092B-C50C-407E-A947-70E740481C1C}">
+                <a14:useLocalDpi xmlns:a14="http://schemas.microsoft.com/office/drawing/2010/main" val="0"/>
+              </a:ext>
+            </a:extLst>
+          </a:blip>
+          <a:stretch>
+            <a:fillRect/>
+          </a:stretch>
+        </p:blipFill>
+        <p:spPr>
+          <a:xfrm>
+            <a:off x="2481479" y="2898"/>
+            <a:ext cx="9710521" cy="6855102"/>
+          </a:xfrm>
+        </p:spPr>
+      </p:pic>
     </p:spTree>
     <p:extLst>
       <p:ext uri="{BB962C8B-B14F-4D97-AF65-F5344CB8AC3E}">
@@ -6761,7 +6707,7 @@
           <p:cNvPr id="2" name="Title 1">
             <a:extLst>
               <a:ext uri="{FF2B5EF4-FFF2-40B4-BE49-F238E27FC236}">
-                <a16:creationId xmlns:a16="http://schemas.microsoft.com/office/drawing/2014/main" xmlns="" id="{8E3843A8-0F89-F1DA-3980-8B04BCBCE3A1}"/>
+                <a16:creationId xmlns:a16="http://schemas.microsoft.com/office/drawing/2014/main" id="{8E3843A8-0F89-F1DA-3980-8B04BCBCE3A1}"/>
               </a:ext>
             </a:extLst>
           </p:cNvPr>
@@ -6781,31 +6727,41 @@
           </a:p>
         </p:txBody>
       </p:sp>
-      <p:sp>
-        <p:nvSpPr>
-          <p:cNvPr id="3" name="Content Placeholder 2">
+      <p:pic>
+        <p:nvPicPr>
+          <p:cNvPr id="5" name="Content Placeholder 4">
             <a:extLst>
               <a:ext uri="{FF2B5EF4-FFF2-40B4-BE49-F238E27FC236}">
-                <a16:creationId xmlns:a16="http://schemas.microsoft.com/office/drawing/2014/main" xmlns="" id="{8A7237F6-C8CC-976C-C3A8-A09EED423C90}"/>
+                <a16:creationId xmlns:a16="http://schemas.microsoft.com/office/drawing/2014/main" id="{16EDDE61-FE24-8124-4E84-3A1F12675AF6}"/>
               </a:ext>
             </a:extLst>
           </p:cNvPr>
-          <p:cNvSpPr>
-            <a:spLocks noGrp="1"/>
-          </p:cNvSpPr>
+          <p:cNvPicPr>
+            <a:picLocks noGrp="1" noChangeAspect="1"/>
+          </p:cNvPicPr>
           <p:nvPr>
             <p:ph idx="1"/>
           </p:nvPr>
-        </p:nvSpPr>
-        <p:spPr/>
-        <p:txBody>
-          <a:bodyPr/>
-          <a:lstStyle/>
-          <a:p>
-            <a:endParaRPr lang="en-US"/>
-          </a:p>
-        </p:txBody>
-      </p:sp>
+        </p:nvPicPr>
+        <p:blipFill>
+          <a:blip r:embed="rId2">
+            <a:extLst>
+              <a:ext uri="{28A0092B-C50C-407E-A947-70E740481C1C}">
+                <a14:useLocalDpi xmlns:a14="http://schemas.microsoft.com/office/drawing/2010/main" val="0"/>
+              </a:ext>
+            </a:extLst>
+          </a:blip>
+          <a:stretch>
+            <a:fillRect/>
+          </a:stretch>
+        </p:blipFill>
+        <p:spPr>
+          <a:xfrm>
+            <a:off x="0" y="0"/>
+            <a:ext cx="12156666" cy="6851331"/>
+          </a:xfrm>
+        </p:spPr>
+      </p:pic>
     </p:spTree>
     <p:extLst>
       <p:ext uri="{BB962C8B-B14F-4D97-AF65-F5344CB8AC3E}">
@@ -6855,25 +6811,41 @@
           </a:p>
         </p:txBody>
       </p:sp>
-      <p:sp>
-        <p:nvSpPr>
-          <p:cNvPr id="3" name="Content Placeholder 2"/>
-          <p:cNvSpPr>
-            <a:spLocks noGrp="1"/>
-          </p:cNvSpPr>
+      <p:pic>
+        <p:nvPicPr>
+          <p:cNvPr id="5" name="Content Placeholder 4">
+            <a:extLst>
+              <a:ext uri="{FF2B5EF4-FFF2-40B4-BE49-F238E27FC236}">
+                <a16:creationId xmlns:a16="http://schemas.microsoft.com/office/drawing/2014/main" id="{A90E3EED-09AB-2980-9B1E-497AA97DB52A}"/>
+              </a:ext>
+            </a:extLst>
+          </p:cNvPr>
+          <p:cNvPicPr>
+            <a:picLocks noGrp="1" noChangeAspect="1"/>
+          </p:cNvPicPr>
           <p:nvPr>
             <p:ph idx="1"/>
           </p:nvPr>
-        </p:nvSpPr>
-        <p:spPr/>
-        <p:txBody>
-          <a:bodyPr/>
-          <a:lstStyle/>
-          <a:p>
-            <a:endParaRPr lang="vi-VN"/>
-          </a:p>
-        </p:txBody>
-      </p:sp>
+        </p:nvPicPr>
+        <p:blipFill>
+          <a:blip r:embed="rId2">
+            <a:extLst>
+              <a:ext uri="{28A0092B-C50C-407E-A947-70E740481C1C}">
+                <a14:useLocalDpi xmlns:a14="http://schemas.microsoft.com/office/drawing/2010/main" val="0"/>
+              </a:ext>
+            </a:extLst>
+          </a:blip>
+          <a:stretch>
+            <a:fillRect/>
+          </a:stretch>
+        </p:blipFill>
+        <p:spPr>
+          <a:xfrm>
+            <a:off x="0" y="1"/>
+            <a:ext cx="12184143" cy="6858000"/>
+          </a:xfrm>
+        </p:spPr>
+      </p:pic>
     </p:spTree>
     <p:extLst>
       <p:ext uri="{BB962C8B-B14F-4D97-AF65-F5344CB8AC3E}">
@@ -6909,7 +6881,7 @@
           <p:cNvPr id="2" name="Title 1">
             <a:extLst>
               <a:ext uri="{FF2B5EF4-FFF2-40B4-BE49-F238E27FC236}">
-                <a16:creationId xmlns:a16="http://schemas.microsoft.com/office/drawing/2014/main" xmlns="" id="{1DC4F1EC-20C6-7C8C-C1D5-53F7D3E37F72}"/>
+                <a16:creationId xmlns:a16="http://schemas.microsoft.com/office/drawing/2014/main" id="{1DC4F1EC-20C6-7C8C-C1D5-53F7D3E37F72}"/>
               </a:ext>
             </a:extLst>
           </p:cNvPr>
@@ -6926,10 +6898,9 @@
           <a:lstStyle/>
           <a:p>
             <a:r>
-              <a:rPr lang="en-US" dirty="0" smtClean="0"/>
+              <a:rPr lang="en-US" dirty="0"/>
               <a:t>Road to Health and Fitness</a:t>
             </a:r>
-            <a:endParaRPr lang="en-US" dirty="0"/>
           </a:p>
         </p:txBody>
       </p:sp>
@@ -6958,35 +6929,131 @@
           </a:graphicData>
         </a:graphic>
       </p:graphicFrame>
-      <p:pic>
-        <p:nvPicPr>
-          <p:cNvPr id="3" name="Content Placeholder 2"/>
-          <p:cNvPicPr>
-            <a:picLocks noGrp="1" noChangeAspect="1"/>
-          </p:cNvPicPr>
-          <p:nvPr>
-            <p:ph sz="half" idx="2"/>
-          </p:nvPr>
-        </p:nvPicPr>
-        <p:blipFill>
-          <a:blip r:embed="rId7">
-            <a:extLst>
-              <a:ext uri="{28A0092B-C50C-407E-A947-70E740481C1C}">
-                <a14:useLocalDpi xmlns:a14="http://schemas.microsoft.com/office/drawing/2010/main" val="0"/>
-              </a:ext>
-            </a:extLst>
-          </a:blip>
-          <a:stretch>
-            <a:fillRect/>
-          </a:stretch>
-        </p:blipFill>
-        <p:spPr>
-          <a:xfrm>
-            <a:off x="7015942" y="2254236"/>
-            <a:ext cx="3823854" cy="3823854"/>
-          </a:xfrm>
-        </p:spPr>
-      </p:pic>
+      <mc:AlternateContent xmlns:mc="http://schemas.openxmlformats.org/markup-compatibility/2006">
+        <mc:Choice xmlns:am3d="http://schemas.microsoft.com/office/drawing/2017/model3d" Requires="am3d">
+          <p:graphicFrame>
+            <p:nvGraphicFramePr>
+              <p:cNvPr id="10" name="Content Placeholder 9" descr="Male Spikey Hair Jeans">
+                <a:extLst>
+                  <a:ext uri="{FF2B5EF4-FFF2-40B4-BE49-F238E27FC236}">
+                    <a16:creationId xmlns:a16="http://schemas.microsoft.com/office/drawing/2014/main" id="{CA733842-B6F5-4CCD-6E69-3357A78311B5}"/>
+                  </a:ext>
+                </a:extLst>
+              </p:cNvPr>
+              <p:cNvGraphicFramePr>
+                <a:graphicFrameLocks noGrp="1"/>
+              </p:cNvGraphicFramePr>
+              <p:nvPr>
+                <p:ph sz="half" idx="2"/>
+                <p:extLst>
+                  <p:ext uri="{D42A27DB-BD31-4B8C-83A1-F6EECF244321}">
+                    <p14:modId xmlns:p14="http://schemas.microsoft.com/office/powerpoint/2010/main" val="258007347"/>
+                  </p:ext>
+                </p:extLst>
+              </p:nvPr>
+            </p:nvGraphicFramePr>
+            <p:xfrm>
+              <a:off x="7127864" y="2092751"/>
+              <a:ext cx="3298181" cy="3558053"/>
+            </p:xfrm>
+            <a:graphic>
+              <a:graphicData uri="http://schemas.microsoft.com/office/drawing/2017/model3d">
+                <am3d:model3d r:embed="rId7">
+                  <am3d:spPr>
+                    <a:xfrm>
+                      <a:off x="0" y="0"/>
+                      <a:ext cx="3298181" cy="3558053"/>
+                    </a:xfrm>
+                    <a:prstGeom prst="rect">
+                      <a:avLst/>
+                    </a:prstGeom>
+                  </am3d:spPr>
+                  <am3d:camera>
+                    <am3d:pos x="0" y="0" z="64780441"/>
+                    <am3d:up dx="0" dy="36000000" dz="0"/>
+                    <am3d:lookAt x="0" y="0" z="0"/>
+                    <am3d:perspective fov="2700000"/>
+                  </am3d:camera>
+                  <am3d:trans>
+                    <am3d:meterPerModelUnit n="646200" d="1000000"/>
+                    <am3d:preTrans dx="0" dy="-18007853" dz="-89082"/>
+                    <am3d:scale>
+                      <am3d:sx n="1000000" d="1000000"/>
+                      <am3d:sy n="1000000" d="1000000"/>
+                      <am3d:sz n="1000000" d="1000000"/>
+                    </am3d:scale>
+                    <am3d:rot/>
+                    <am3d:postTrans dx="0" dy="0" dz="0"/>
+                  </am3d:trans>
+                  <am3d:raster rName="Office3DRenderer" rVer="16.0.8326">
+                    <am3d:blip r:embed="rId8"/>
+                  </am3d:raster>
+                  <am3d:objViewport viewportSz="4966971"/>
+                  <am3d:ambientLight>
+                    <am3d:clr>
+                      <a:scrgbClr r="50000" g="50000" b="50000"/>
+                    </am3d:clr>
+                    <am3d:illuminance n="500000" d="1000000"/>
+                  </am3d:ambientLight>
+                  <am3d:ptLight rad="0">
+                    <am3d:clr>
+                      <a:scrgbClr r="100000" g="75000" b="50000"/>
+                    </am3d:clr>
+                    <am3d:intensity n="9765625" d="1000000"/>
+                    <am3d:pos x="21959998" y="70920001" z="16344003"/>
+                  </am3d:ptLight>
+                  <am3d:ptLight rad="0">
+                    <am3d:clr>
+                      <a:scrgbClr r="40000" g="60000" b="95000"/>
+                    </am3d:clr>
+                    <am3d:intensity n="12250000" d="1000000"/>
+                    <am3d:pos x="-37964106" y="51130435" z="57631972"/>
+                  </am3d:ptLight>
+                  <am3d:ptLight rad="0">
+                    <am3d:clr>
+                      <a:scrgbClr r="86837" g="72700" b="100000"/>
+                    </am3d:clr>
+                    <am3d:intensity n="3125000" d="1000000"/>
+                    <am3d:pos x="-37739122" y="58056624" z="-34769649"/>
+                  </am3d:ptLight>
+                </am3d:model3d>
+              </a:graphicData>
+            </a:graphic>
+          </p:graphicFrame>
+        </mc:Choice>
+        <mc:Fallback>
+          <p:pic>
+            <p:nvPicPr>
+              <p:cNvPr id="10" name="Content Placeholder 9" descr="Male Spikey Hair Jeans">
+                <a:extLst>
+                  <a:ext uri="{FF2B5EF4-FFF2-40B4-BE49-F238E27FC236}">
+                    <a16:creationId xmlns:a16="http://schemas.microsoft.com/office/drawing/2014/main" id="{CA733842-B6F5-4CCD-6E69-3357A78311B5}"/>
+                  </a:ext>
+                </a:extLst>
+              </p:cNvPr>
+              <p:cNvPicPr>
+                <a:picLocks noGrp="1" noRot="1" noChangeAspect="1" noMove="1" noResize="1" noEditPoints="1" noAdjustHandles="1" noChangeArrowheads="1" noChangeShapeType="1" noCrop="1"/>
+              </p:cNvPicPr>
+              <p:nvPr/>
+            </p:nvPicPr>
+            <p:blipFill>
+              <a:blip r:embed="rId8"/>
+              <a:stretch>
+                <a:fillRect/>
+              </a:stretch>
+            </p:blipFill>
+            <p:spPr>
+              <a:xfrm>
+                <a:off x="7127864" y="2092751"/>
+                <a:ext cx="3298181" cy="3558053"/>
+              </a:xfrm>
+              <a:prstGeom prst="rect">
+                <a:avLst/>
+              </a:prstGeom>
+            </p:spPr>
+          </p:pic>
+        </mc:Fallback>
+      </mc:AlternateContent>
     </p:spTree>
     <p:extLst>
       <p:ext uri="{BB962C8B-B14F-4D97-AF65-F5344CB8AC3E}">
@@ -7033,7 +7100,7 @@
           <a:lstStyle/>
           <a:p>
             <a:r>
-              <a:rPr lang="en-US" dirty="0" smtClean="0"/>
+              <a:rPr lang="en-US" dirty="0"/>
               <a:t>Track Your Progress</a:t>
             </a:r>
             <a:endParaRPr lang="vi-VN" dirty="0"/>
@@ -7050,7 +7117,7 @@
             <p:ph sz="half" idx="1"/>
             <p:extLst>
               <p:ext uri="{D42A27DB-BD31-4B8C-83A1-F6EECF244321}">
-                <p14:modId xmlns:p14="http://schemas.microsoft.com/office/powerpoint/2010/main" val="1991312820"/>
+                <p14:modId xmlns:p14="http://schemas.microsoft.com/office/powerpoint/2010/main" val="902255830"/>
               </p:ext>
             </p:extLst>
           </p:nvPr>
@@ -7066,8 +7133,20 @@
                 <a:tableStyleId>{21E4AEA4-8DFA-4A89-87EB-49C32662AFE0}</a:tableStyleId>
               </a:tblPr>
               <a:tblGrid>
-                <a:gridCol w="2590800"/>
-                <a:gridCol w="2590800"/>
+                <a:gridCol w="2590800">
+                  <a:extLst>
+                    <a:ext uri="{9D8B030D-6E8A-4147-A177-3AD203B41FA5}">
+                      <a16:colId xmlns:a16="http://schemas.microsoft.com/office/drawing/2014/main" val="20000"/>
+                    </a:ext>
+                  </a:extLst>
+                </a:gridCol>
+                <a:gridCol w="2590800">
+                  <a:extLst>
+                    <a:ext uri="{9D8B030D-6E8A-4147-A177-3AD203B41FA5}">
+                      <a16:colId xmlns:a16="http://schemas.microsoft.com/office/drawing/2014/main" val="20001"/>
+                    </a:ext>
+                  </a:extLst>
+                </a:gridCol>
               </a:tblGrid>
               <a:tr h="551700">
                 <a:tc>
@@ -7077,7 +7156,7 @@
                     <a:p>
                       <a:pPr algn="ctr"/>
                       <a:r>
-                        <a:rPr lang="en-US" b="1" dirty="0" smtClean="0"/>
+                        <a:rPr lang="en-US" b="1" dirty="0"/>
                         <a:t>Week</a:t>
                       </a:r>
                       <a:endParaRPr lang="vi-VN" b="1" dirty="0"/>
@@ -7092,23 +7171,23 @@
                     <a:p>
                       <a:pPr algn="ctr"/>
                       <a:r>
-                        <a:rPr lang="en-US" b="1" dirty="0" smtClean="0"/>
+                        <a:rPr lang="en-US" b="1" dirty="0"/>
                         <a:t>Cardio</a:t>
                       </a:r>
-                      <a:endParaRPr lang="en-US" b="1" baseline="0" dirty="0" smtClean="0"/>
+                      <a:endParaRPr lang="en-US" b="1" baseline="0" dirty="0"/>
                     </a:p>
                     <a:p>
                       <a:pPr algn="ctr"/>
                       <a:r>
-                        <a:rPr lang="en-US" b="1" baseline="0" dirty="0" smtClean="0"/>
+                        <a:rPr lang="en-US" b="1" baseline="0" dirty="0"/>
                         <a:t>(</a:t>
                       </a:r>
                       <a:r>
-                        <a:rPr lang="en-US" b="1" baseline="0" dirty="0" err="1" smtClean="0"/>
+                        <a:rPr lang="en-US" b="1" baseline="0" dirty="0" err="1"/>
                         <a:t>microtps</a:t>
                       </a:r>
                       <a:r>
-                        <a:rPr lang="en-US" b="1" baseline="0" dirty="0" smtClean="0"/>
+                        <a:rPr lang="en-US" b="1" baseline="0" dirty="0"/>
                         <a:t>)</a:t>
                       </a:r>
                       <a:endParaRPr lang="vi-VN" b="1" dirty="0"/>
@@ -7116,6 +7195,11 @@
                   </a:txBody>
                   <a:tcPr/>
                 </a:tc>
+                <a:extLst>
+                  <a:ext uri="{0D108BD9-81ED-4DB2-BD59-A6C34878D82A}">
+                    <a16:rowId xmlns:a16="http://schemas.microsoft.com/office/drawing/2014/main" val="10000"/>
+                  </a:ext>
+                </a:extLst>
               </a:tr>
               <a:tr h="551700">
                 <a:tc>
@@ -7125,11 +7209,11 @@
                     <a:p>
                       <a:pPr algn="ctr"/>
                       <a:r>
-                        <a:rPr lang="en-US" b="1" dirty="0" smtClean="0"/>
+                        <a:rPr lang="en-US" b="1" dirty="0"/>
                         <a:t>Week</a:t>
                       </a:r>
                       <a:r>
-                        <a:rPr lang="en-US" b="1" baseline="0" dirty="0" smtClean="0"/>
+                        <a:rPr lang="en-US" b="1" baseline="0" dirty="0"/>
                         <a:t> 1</a:t>
                       </a:r>
                     </a:p>
@@ -7142,15 +7226,16 @@
                     <a:lstStyle/>
                     <a:p>
                       <a:pPr algn="ctr"/>
-                      <a:r>
-                        <a:rPr lang="en-US" b="1" dirty="0" smtClean="0"/>
-                        <a:t>5</a:t>
-                      </a:r>
                       <a:endParaRPr lang="vi-VN" b="1" dirty="0"/>
                     </a:p>
                   </a:txBody>
                   <a:tcPr/>
                 </a:tc>
+                <a:extLst>
+                  <a:ext uri="{0D108BD9-81ED-4DB2-BD59-A6C34878D82A}">
+                    <a16:rowId xmlns:a16="http://schemas.microsoft.com/office/drawing/2014/main" val="10001"/>
+                  </a:ext>
+                </a:extLst>
               </a:tr>
               <a:tr h="551700">
                 <a:tc>
@@ -7160,11 +7245,11 @@
                     <a:p>
                       <a:pPr algn="ctr"/>
                       <a:r>
-                        <a:rPr lang="en-US" b="1" dirty="0" smtClean="0"/>
+                        <a:rPr lang="en-US" b="1" dirty="0"/>
                         <a:t>Week</a:t>
                       </a:r>
                       <a:r>
-                        <a:rPr lang="en-US" b="1" baseline="0" dirty="0" smtClean="0"/>
+                        <a:rPr lang="en-US" b="1" baseline="0" dirty="0"/>
                         <a:t> 2</a:t>
                       </a:r>
                       <a:endParaRPr lang="vi-VN" b="1" dirty="0"/>
@@ -7178,15 +7263,16 @@
                     <a:lstStyle/>
                     <a:p>
                       <a:pPr algn="ctr"/>
-                      <a:r>
-                        <a:rPr lang="en-US" b="1" dirty="0" smtClean="0"/>
-                        <a:t>7</a:t>
-                      </a:r>
                       <a:endParaRPr lang="vi-VN" b="1" dirty="0"/>
                     </a:p>
                   </a:txBody>
                   <a:tcPr/>
                 </a:tc>
+                <a:extLst>
+                  <a:ext uri="{0D108BD9-81ED-4DB2-BD59-A6C34878D82A}">
+                    <a16:rowId xmlns:a16="http://schemas.microsoft.com/office/drawing/2014/main" val="10002"/>
+                  </a:ext>
+                </a:extLst>
               </a:tr>
               <a:tr h="551700">
                 <a:tc>
@@ -7196,11 +7282,11 @@
                     <a:p>
                       <a:pPr algn="ctr"/>
                       <a:r>
-                        <a:rPr lang="en-US" b="1" dirty="0" smtClean="0"/>
+                        <a:rPr lang="en-US" b="1" dirty="0"/>
                         <a:t>Week</a:t>
                       </a:r>
                       <a:r>
-                        <a:rPr lang="en-US" b="1" baseline="0" dirty="0" smtClean="0"/>
+                        <a:rPr lang="en-US" b="1" baseline="0" dirty="0"/>
                         <a:t> 3</a:t>
                       </a:r>
                       <a:endParaRPr lang="vi-VN" b="1" dirty="0"/>
@@ -7214,15 +7300,16 @@
                     <a:lstStyle/>
                     <a:p>
                       <a:pPr algn="ctr"/>
-                      <a:r>
-                        <a:rPr lang="en-US" b="1" dirty="0" smtClean="0"/>
-                        <a:t>4</a:t>
-                      </a:r>
                       <a:endParaRPr lang="vi-VN" b="1" dirty="0"/>
                     </a:p>
                   </a:txBody>
                   <a:tcPr/>
                 </a:tc>
+                <a:extLst>
+                  <a:ext uri="{0D108BD9-81ED-4DB2-BD59-A6C34878D82A}">
+                    <a16:rowId xmlns:a16="http://schemas.microsoft.com/office/drawing/2014/main" val="10003"/>
+                  </a:ext>
+                </a:extLst>
               </a:tr>
               <a:tr h="551700">
                 <a:tc>
@@ -7232,11 +7319,11 @@
                     <a:p>
                       <a:pPr algn="ctr"/>
                       <a:r>
-                        <a:rPr lang="en-US" b="1" dirty="0" smtClean="0"/>
+                        <a:rPr lang="en-US" b="1" dirty="0"/>
                         <a:t>Week</a:t>
                       </a:r>
                       <a:r>
-                        <a:rPr lang="en-US" b="1" baseline="0" dirty="0" smtClean="0"/>
+                        <a:rPr lang="en-US" b="1" baseline="0" dirty="0"/>
                         <a:t> 4</a:t>
                       </a:r>
                       <a:endParaRPr lang="vi-VN" b="1" dirty="0"/>
@@ -7250,15 +7337,16 @@
                     <a:lstStyle/>
                     <a:p>
                       <a:pPr algn="ctr"/>
-                      <a:r>
-                        <a:rPr lang="en-US" b="1" dirty="0" smtClean="0"/>
-                        <a:t>7</a:t>
-                      </a:r>
                       <a:endParaRPr lang="vi-VN" b="1" dirty="0"/>
                     </a:p>
                   </a:txBody>
                   <a:tcPr/>
                 </a:tc>
+                <a:extLst>
+                  <a:ext uri="{0D108BD9-81ED-4DB2-BD59-A6C34878D82A}">
+                    <a16:rowId xmlns:a16="http://schemas.microsoft.com/office/drawing/2014/main" val="10004"/>
+                  </a:ext>
+                </a:extLst>
               </a:tr>
               <a:tr h="551700">
                 <a:tc>
@@ -7268,11 +7356,11 @@
                     <a:p>
                       <a:pPr algn="ctr"/>
                       <a:r>
-                        <a:rPr lang="en-US" b="1" dirty="0" smtClean="0"/>
+                        <a:rPr lang="en-US" b="1" dirty="0"/>
                         <a:t>Week</a:t>
                       </a:r>
                       <a:r>
-                        <a:rPr lang="en-US" b="1" baseline="0" dirty="0" smtClean="0"/>
+                        <a:rPr lang="en-US" b="1" baseline="0" dirty="0"/>
                         <a:t> 5</a:t>
                       </a:r>
                       <a:endParaRPr lang="vi-VN" b="1" dirty="0"/>
@@ -7286,15 +7374,16 @@
                     <a:lstStyle/>
                     <a:p>
                       <a:pPr algn="ctr"/>
-                      <a:r>
-                        <a:rPr lang="en-US" b="1" dirty="0" smtClean="0"/>
-                        <a:t>6</a:t>
-                      </a:r>
                       <a:endParaRPr lang="vi-VN" b="1" dirty="0"/>
                     </a:p>
                   </a:txBody>
                   <a:tcPr/>
                 </a:tc>
+                <a:extLst>
+                  <a:ext uri="{0D108BD9-81ED-4DB2-BD59-A6C34878D82A}">
+                    <a16:rowId xmlns:a16="http://schemas.microsoft.com/office/drawing/2014/main" val="10005"/>
+                  </a:ext>
+                </a:extLst>
               </a:tr>
               <a:tr h="551700">
                 <a:tc>
@@ -7304,11 +7393,11 @@
                     <a:p>
                       <a:pPr algn="ctr"/>
                       <a:r>
-                        <a:rPr lang="en-US" b="1" dirty="0" smtClean="0"/>
+                        <a:rPr lang="en-US" b="1" dirty="0"/>
                         <a:t>Week</a:t>
                       </a:r>
                       <a:r>
-                        <a:rPr lang="en-US" b="1" baseline="0" dirty="0" smtClean="0"/>
+                        <a:rPr lang="en-US" b="1" baseline="0" dirty="0"/>
                         <a:t> 6</a:t>
                       </a:r>
                       <a:endParaRPr lang="vi-VN" b="1" dirty="0"/>
@@ -7322,15 +7411,16 @@
                     <a:lstStyle/>
                     <a:p>
                       <a:pPr algn="ctr"/>
-                      <a:r>
-                        <a:rPr lang="en-US" b="1" smtClean="0"/>
-                        <a:t>8</a:t>
-                      </a:r>
                       <a:endParaRPr lang="vi-VN" b="1" dirty="0"/>
                     </a:p>
                   </a:txBody>
                   <a:tcPr/>
                 </a:tc>
+                <a:extLst>
+                  <a:ext uri="{0D108BD9-81ED-4DB2-BD59-A6C34878D82A}">
+                    <a16:rowId xmlns:a16="http://schemas.microsoft.com/office/drawing/2014/main" val="10006"/>
+                  </a:ext>
+                </a:extLst>
               </a:tr>
             </a:tbl>
           </a:graphicData>
@@ -7404,25 +7494,41 @@
           </a:p>
         </p:txBody>
       </p:sp>
-      <p:sp>
-        <p:nvSpPr>
-          <p:cNvPr id="3" name="Content Placeholder 2"/>
-          <p:cNvSpPr>
-            <a:spLocks noGrp="1"/>
-          </p:cNvSpPr>
+      <p:pic>
+        <p:nvPicPr>
+          <p:cNvPr id="6" name="Content Placeholder 5">
+            <a:extLst>
+              <a:ext uri="{FF2B5EF4-FFF2-40B4-BE49-F238E27FC236}">
+                <a16:creationId xmlns:a16="http://schemas.microsoft.com/office/drawing/2014/main" id="{D95F94D5-BE55-CF2C-2F76-F741F93BD9FD}"/>
+              </a:ext>
+            </a:extLst>
+          </p:cNvPr>
+          <p:cNvPicPr>
+            <a:picLocks noGrp="1" noChangeAspect="1"/>
+          </p:cNvPicPr>
           <p:nvPr>
             <p:ph sz="half" idx="1"/>
           </p:nvPr>
-        </p:nvSpPr>
-        <p:spPr/>
-        <p:txBody>
-          <a:bodyPr/>
-          <a:lstStyle/>
-          <a:p>
-            <a:endParaRPr lang="vi-VN"/>
-          </a:p>
-        </p:txBody>
-      </p:sp>
+        </p:nvPicPr>
+        <p:blipFill>
+          <a:blip r:embed="rId2">
+            <a:extLst>
+              <a:ext uri="{28A0092B-C50C-407E-A947-70E740481C1C}">
+                <a14:useLocalDpi xmlns:a14="http://schemas.microsoft.com/office/drawing/2010/main" val="0"/>
+              </a:ext>
+            </a:extLst>
+          </a:blip>
+          <a:stretch>
+            <a:fillRect/>
+          </a:stretch>
+        </p:blipFill>
+        <p:spPr>
+          <a:xfrm>
+            <a:off x="0" y="0"/>
+            <a:ext cx="12203809" cy="6858000"/>
+          </a:xfrm>
+        </p:spPr>
+      </p:pic>
       <p:sp>
         <p:nvSpPr>
           <p:cNvPr id="4" name="Content Placeholder 3"/>

--- a/Data/PPT_Learn/PPT_File/14.pptx
+++ b/Data/PPT_Learn/PPT_File/14.pptx
@@ -3363,7 +3363,7 @@
           <a:p>
             <a:fld id="{51DA3061-A0A7-4F4A-8031-9CD73C4CB18A}" type="datetimeFigureOut">
               <a:rPr lang="en-US" smtClean="0"/>
-              <a:t>12/1/2025</a:t>
+              <a:t>12/9/2025</a:t>
             </a:fld>
             <a:endParaRPr lang="en-US"/>
           </a:p>
@@ -3561,7 +3561,7 @@
           <a:p>
             <a:fld id="{51DA3061-A0A7-4F4A-8031-9CD73C4CB18A}" type="datetimeFigureOut">
               <a:rPr lang="en-US" smtClean="0"/>
-              <a:t>12/1/2025</a:t>
+              <a:t>12/9/2025</a:t>
             </a:fld>
             <a:endParaRPr lang="en-US"/>
           </a:p>
@@ -3769,7 +3769,7 @@
           <a:p>
             <a:fld id="{51DA3061-A0A7-4F4A-8031-9CD73C4CB18A}" type="datetimeFigureOut">
               <a:rPr lang="en-US" smtClean="0"/>
-              <a:t>12/1/2025</a:t>
+              <a:t>12/9/2025</a:t>
             </a:fld>
             <a:endParaRPr lang="en-US"/>
           </a:p>
@@ -3967,7 +3967,7 @@
           <a:p>
             <a:fld id="{51DA3061-A0A7-4F4A-8031-9CD73C4CB18A}" type="datetimeFigureOut">
               <a:rPr lang="en-US" smtClean="0"/>
-              <a:t>12/1/2025</a:t>
+              <a:t>12/9/2025</a:t>
             </a:fld>
             <a:endParaRPr lang="en-US"/>
           </a:p>
@@ -4242,7 +4242,7 @@
           <a:p>
             <a:fld id="{51DA3061-A0A7-4F4A-8031-9CD73C4CB18A}" type="datetimeFigureOut">
               <a:rPr lang="en-US" smtClean="0"/>
-              <a:t>12/1/2025</a:t>
+              <a:t>12/9/2025</a:t>
             </a:fld>
             <a:endParaRPr lang="en-US"/>
           </a:p>
@@ -4507,7 +4507,7 @@
           <a:p>
             <a:fld id="{51DA3061-A0A7-4F4A-8031-9CD73C4CB18A}" type="datetimeFigureOut">
               <a:rPr lang="en-US" smtClean="0"/>
-              <a:t>12/1/2025</a:t>
+              <a:t>12/9/2025</a:t>
             </a:fld>
             <a:endParaRPr lang="en-US"/>
           </a:p>
@@ -4919,7 +4919,7 @@
           <a:p>
             <a:fld id="{51DA3061-A0A7-4F4A-8031-9CD73C4CB18A}" type="datetimeFigureOut">
               <a:rPr lang="en-US" smtClean="0"/>
-              <a:t>12/1/2025</a:t>
+              <a:t>12/9/2025</a:t>
             </a:fld>
             <a:endParaRPr lang="en-US"/>
           </a:p>
@@ -5060,7 +5060,7 @@
           <a:p>
             <a:fld id="{51DA3061-A0A7-4F4A-8031-9CD73C4CB18A}" type="datetimeFigureOut">
               <a:rPr lang="en-US" smtClean="0"/>
-              <a:t>12/1/2025</a:t>
+              <a:t>12/9/2025</a:t>
             </a:fld>
             <a:endParaRPr lang="en-US"/>
           </a:p>
@@ -5173,7 +5173,7 @@
           <a:p>
             <a:fld id="{51DA3061-A0A7-4F4A-8031-9CD73C4CB18A}" type="datetimeFigureOut">
               <a:rPr lang="en-US" smtClean="0"/>
-              <a:t>12/1/2025</a:t>
+              <a:t>12/9/2025</a:t>
             </a:fld>
             <a:endParaRPr lang="en-US"/>
           </a:p>
@@ -5484,7 +5484,7 @@
           <a:p>
             <a:fld id="{51DA3061-A0A7-4F4A-8031-9CD73C4CB18A}" type="datetimeFigureOut">
               <a:rPr lang="en-US" smtClean="0"/>
-              <a:t>12/1/2025</a:t>
+              <a:t>12/9/2025</a:t>
             </a:fld>
             <a:endParaRPr lang="en-US"/>
           </a:p>
@@ -5772,7 +5772,7 @@
           <a:p>
             <a:fld id="{51DA3061-A0A7-4F4A-8031-9CD73C4CB18A}" type="datetimeFigureOut">
               <a:rPr lang="en-US" smtClean="0"/>
-              <a:t>12/1/2025</a:t>
+              <a:t>12/9/2025</a:t>
             </a:fld>
             <a:endParaRPr lang="en-US"/>
           </a:p>
@@ -6016,7 +6016,7 @@
           <a:p>
             <a:fld id="{51DA3061-A0A7-4F4A-8031-9CD73C4CB18A}" type="datetimeFigureOut">
               <a:rPr lang="en-US" smtClean="0"/>
-              <a:t>12/1/2025</a:t>
+              <a:t>12/9/2025</a:t>
             </a:fld>
             <a:endParaRPr lang="en-US"/>
           </a:p>
@@ -7117,7 +7117,7 @@
             <p:ph sz="half" idx="1"/>
             <p:extLst>
               <p:ext uri="{D42A27DB-BD31-4B8C-83A1-F6EECF244321}">
-                <p14:modId xmlns:p14="http://schemas.microsoft.com/office/powerpoint/2010/main" val="902255830"/>
+                <p14:modId xmlns:p14="http://schemas.microsoft.com/office/powerpoint/2010/main" val="1870674825"/>
               </p:ext>
             </p:extLst>
           </p:nvPr>
@@ -7226,6 +7226,10 @@
                     <a:lstStyle/>
                     <a:p>
                       <a:pPr algn="ctr"/>
+                      <a:r>
+                        <a:rPr lang="en-US" b="1" dirty="0"/>
+                        <a:t>5</a:t>
+                      </a:r>
                       <a:endParaRPr lang="vi-VN" b="1" dirty="0"/>
                     </a:p>
                   </a:txBody>
@@ -7263,6 +7267,10 @@
                     <a:lstStyle/>
                     <a:p>
                       <a:pPr algn="ctr"/>
+                      <a:r>
+                        <a:rPr lang="en-US" b="1" dirty="0"/>
+                        <a:t>7</a:t>
+                      </a:r>
                       <a:endParaRPr lang="vi-VN" b="1" dirty="0"/>
                     </a:p>
                   </a:txBody>
@@ -7300,6 +7308,10 @@
                     <a:lstStyle/>
                     <a:p>
                       <a:pPr algn="ctr"/>
+                      <a:r>
+                        <a:rPr lang="en-US" b="1" dirty="0"/>
+                        <a:t>4</a:t>
+                      </a:r>
                       <a:endParaRPr lang="vi-VN" b="1" dirty="0"/>
                     </a:p>
                   </a:txBody>
@@ -7337,6 +7349,10 @@
                     <a:lstStyle/>
                     <a:p>
                       <a:pPr algn="ctr"/>
+                      <a:r>
+                        <a:rPr lang="en-US" b="1" dirty="0"/>
+                        <a:t>7</a:t>
+                      </a:r>
                       <a:endParaRPr lang="vi-VN" b="1" dirty="0"/>
                     </a:p>
                   </a:txBody>
@@ -7374,6 +7390,10 @@
                     <a:lstStyle/>
                     <a:p>
                       <a:pPr algn="ctr"/>
+                      <a:r>
+                        <a:rPr lang="en-US" b="1" dirty="0"/>
+                        <a:t>6</a:t>
+                      </a:r>
                       <a:endParaRPr lang="vi-VN" b="1" dirty="0"/>
                     </a:p>
                   </a:txBody>
@@ -7411,6 +7431,10 @@
                     <a:lstStyle/>
                     <a:p>
                       <a:pPr algn="ctr"/>
+                      <a:r>
+                        <a:rPr lang="en-US" b="1" dirty="0"/>
+                        <a:t>8</a:t>
+                      </a:r>
                       <a:endParaRPr lang="vi-VN" b="1" dirty="0"/>
                     </a:p>
                   </a:txBody>
